--- a/Case2_GenAI_Collateral.pptx
+++ b/Case2_GenAI_Collateral.pptx
@@ -15,6 +15,7 @@
     <p:sldId id="263" r:id="rId14"/>
     <p:sldId id="264" r:id="rId15"/>
     <p:sldId id="265" r:id="rId16"/>
+    <p:sldId id="266" r:id="rId17"/>
   </p:sldIdLst>
   <p:sldSz cx="12191695" cy="6858000" type="screen4x3"/>
   <p:notesSz cx="6858000" cy="9144000"/>
@@ -3435,7 +3436,7 @@
                 </a:solidFill>
                 <a:latin typeface="Consolas"/>
               </a:rPr>
-              <a:t>ROADMAP</a:t>
+              <a:t>DESIGN DECISIONS</a:t>
             </a:r>
           </a:p>
         </p:txBody>
@@ -3474,21 +3475,56 @@
                 </a:solidFill>
                 <a:latin typeface="Trebuchet MS"/>
               </a:rPr>
-              <a:t>A working slice today — a clear path to scale</a:t>
-            </a:r>
-          </a:p>
-        </p:txBody>
-      </p:sp>
-      <p:sp>
-        <p:nvSpPr>
-          <p:cNvPr id="4" name="Rounded Rectangle 3"/>
+              <a:t>Why these choices?</a:t>
+            </a:r>
+          </a:p>
+        </p:txBody>
+      </p:sp>
+      <p:sp>
+        <p:nvSpPr>
+          <p:cNvPr id="4" name="TextBox 3"/>
+          <p:cNvSpPr txBox="1"/>
+          <p:nvPr/>
+        </p:nvSpPr>
+        <p:spPr>
+          <a:xfrm>
+            <a:off x="777240" y="1572768"/>
+            <a:ext cx="10607040" cy="365760"/>
+          </a:xfrm>
+          <a:prstGeom prst="rect">
+            <a:avLst/>
+          </a:prstGeom>
+          <a:noFill/>
+        </p:spPr>
+        <p:txBody>
+          <a:bodyPr wrap="square" anchor="t" lIns="0" rIns="0" tIns="0" bIns="0">
+            <a:spAutoFit/>
+          </a:bodyPr>
+          <a:lstStyle/>
+          <a:p>
+            <a:pPr algn="l"/>
+            <a:r>
+              <a:rPr sz="1400" b="0">
+                <a:solidFill>
+                  <a:srgbClr val="475569"/>
+                </a:solidFill>
+                <a:latin typeface="Calibri"/>
+              </a:rPr>
+              <a:t>Pragmatism over shiny — the simplest thing that works, with the upgrade path named.</a:t>
+            </a:r>
+          </a:p>
+        </p:txBody>
+      </p:sp>
+      <p:sp>
+        <p:nvSpPr>
+          <p:cNvPr id="5" name="Rounded Rectangle 4"/>
           <p:cNvSpPr/>
           <p:nvPr/>
         </p:nvSpPr>
         <p:spPr>
           <a:xfrm>
-            <a:off x="777240" y="2240280"/>
-            <a:ext cx="5212080" cy="1691640"/>
+            <a:off x="777240" y="2148840"/>
+            <a:ext cx="10607040" cy="731520"/>
           </a:xfrm>
           <a:prstGeom prst="roundRect">
             <a:avLst/>
@@ -3536,14 +3572,14 @@
       </p:sp>
       <p:sp>
         <p:nvSpPr>
-          <p:cNvPr id="5" name="TextBox 4"/>
+          <p:cNvPr id="6" name="TextBox 5"/>
           <p:cNvSpPr txBox="1"/>
           <p:nvPr/>
         </p:nvSpPr>
         <p:spPr>
           <a:xfrm>
-            <a:off x="1051560" y="2468880"/>
-            <a:ext cx="4663440" cy="457200"/>
+            <a:off x="1051560" y="2258568"/>
+            <a:ext cx="10058400" cy="292608"/>
           </a:xfrm>
           <a:prstGeom prst="rect">
             <a:avLst/>
@@ -3558,27 +3594,27 @@
           <a:p>
             <a:pPr algn="l"/>
             <a:r>
-              <a:rPr sz="1500" b="1">
+              <a:rPr sz="1400" b="1">
                 <a:solidFill>
                   <a:srgbClr val="10151E"/>
                 </a:solidFill>
                 <a:latin typeface="Trebuchet MS"/>
               </a:rPr>
-              <a:t>Multi-tenancy</a:t>
-            </a:r>
-          </a:p>
-        </p:txBody>
-      </p:sp>
-      <p:sp>
-        <p:nvSpPr>
-          <p:cNvPr id="6" name="TextBox 5"/>
+              <a:t>Deterministic typed pipeline — not an agent</a:t>
+            </a:r>
+          </a:p>
+        </p:txBody>
+      </p:sp>
+      <p:sp>
+        <p:nvSpPr>
+          <p:cNvPr id="7" name="TextBox 6"/>
           <p:cNvSpPr txBox="1"/>
           <p:nvPr/>
         </p:nvSpPr>
         <p:spPr>
           <a:xfrm>
-            <a:off x="1051560" y="3017520"/>
-            <a:ext cx="4663440" cy="822960"/>
+            <a:off x="1051560" y="2569464"/>
+            <a:ext cx="10058400" cy="274320"/>
           </a:xfrm>
           <a:prstGeom prst="rect">
             <a:avLst/>
@@ -3591,33 +3627,29 @@
           </a:bodyPr>
           <a:lstStyle/>
           <a:p>
-            <a:pPr algn="l">
-              <a:lnSpc>
-                <a:spcPct val="115000"/>
-              </a:lnSpc>
-            </a:pPr>
-            <a:r>
-              <a:rPr sz="1300" b="0">
+            <a:pPr algn="l"/>
+            <a:r>
+              <a:rPr sz="1150" b="0">
                 <a:solidFill>
                   <a:srgbClr val="475569"/>
                 </a:solidFill>
                 <a:latin typeface="Calibri"/>
               </a:rPr>
-              <a:t>tenant from the token; per-tenant CMEK + budgets (plumbing already in place)</a:t>
-            </a:r>
-          </a:p>
-        </p:txBody>
-      </p:sp>
-      <p:sp>
-        <p:nvSpPr>
-          <p:cNvPr id="7" name="Rounded Rectangle 6"/>
+              <a:t>predictable, testable, traceable; ADK / Agent Engine only when we add tools or a HITL pause</a:t>
+            </a:r>
+          </a:p>
+        </p:txBody>
+      </p:sp>
+      <p:sp>
+        <p:nvSpPr>
+          <p:cNvPr id="8" name="Rounded Rectangle 7"/>
           <p:cNvSpPr/>
           <p:nvPr/>
         </p:nvSpPr>
         <p:spPr>
           <a:xfrm>
-            <a:off x="6172200" y="2240280"/>
-            <a:ext cx="5212080" cy="1691640"/>
+            <a:off x="777240" y="2971800"/>
+            <a:ext cx="10607040" cy="731520"/>
           </a:xfrm>
           <a:prstGeom prst="roundRect">
             <a:avLst/>
@@ -3665,14 +3697,14 @@
       </p:sp>
       <p:sp>
         <p:nvSpPr>
-          <p:cNvPr id="8" name="TextBox 7"/>
+          <p:cNvPr id="9" name="TextBox 8"/>
           <p:cNvSpPr txBox="1"/>
           <p:nvPr/>
         </p:nvSpPr>
         <p:spPr>
           <a:xfrm>
-            <a:off x="6446520" y="2468880"/>
-            <a:ext cx="4663440" cy="457200"/>
+            <a:off x="1051560" y="3081528"/>
+            <a:ext cx="10058400" cy="292608"/>
           </a:xfrm>
           <a:prstGeom prst="rect">
             <a:avLst/>
@@ -3687,27 +3719,27 @@
           <a:p>
             <a:pPr algn="l"/>
             <a:r>
-              <a:rPr sz="1500" b="1">
+              <a:rPr sz="1400" b="1">
                 <a:solidFill>
                   <a:srgbClr val="10151E"/>
                 </a:solidFill>
                 <a:latin typeface="Trebuchet MS"/>
               </a:rPr>
-              <a:t>Org dashboard</a:t>
-            </a:r>
-          </a:p>
-        </p:txBody>
-      </p:sp>
-      <p:sp>
-        <p:nvSpPr>
-          <p:cNvPr id="9" name="TextBox 8"/>
+              <a:t>Long-context grounding — not RAG</a:t>
+            </a:r>
+          </a:p>
+        </p:txBody>
+      </p:sp>
+      <p:sp>
+        <p:nvSpPr>
+          <p:cNvPr id="10" name="TextBox 9"/>
           <p:cNvSpPr txBox="1"/>
           <p:nvPr/>
         </p:nvSpPr>
         <p:spPr>
           <a:xfrm>
-            <a:off x="6446520" y="3017520"/>
-            <a:ext cx="4663440" cy="822960"/>
+            <a:off x="1051560" y="3392424"/>
+            <a:ext cx="10058400" cy="274320"/>
           </a:xfrm>
           <a:prstGeom prst="rect">
             <a:avLst/>
@@ -3720,33 +3752,29 @@
           </a:bodyPr>
           <a:lstStyle/>
           <a:p>
-            <a:pPr algn="l">
-              <a:lnSpc>
-                <a:spcPct val="115000"/>
-              </a:lnSpc>
-            </a:pPr>
-            <a:r>
-              <a:rPr sz="1300" b="0">
+            <a:pPr algn="l"/>
+            <a:r>
+              <a:rPr sz="1150" b="0">
                 <a:solidFill>
                   <a:srgbClr val="475569"/>
                 </a:solidFill>
                 <a:latin typeface="Calibri"/>
               </a:rPr>
-              <a:t>every generation → BigQuery → Looker: cost/brochure, groundedness, throughput</a:t>
-            </a:r>
-          </a:p>
-        </p:txBody>
-      </p:sp>
-      <p:sp>
-        <p:nvSpPr>
-          <p:cNvPr id="10" name="Rounded Rectangle 9"/>
+              <a:t>a bounded two-company corpus fits in context — full traceability, no vector DB; RAG when it grows</a:t>
+            </a:r>
+          </a:p>
+        </p:txBody>
+      </p:sp>
+      <p:sp>
+        <p:nvSpPr>
+          <p:cNvPr id="11" name="Rounded Rectangle 10"/>
           <p:cNvSpPr/>
           <p:nvPr/>
         </p:nvSpPr>
         <p:spPr>
           <a:xfrm>
-            <a:off x="777240" y="4160520"/>
-            <a:ext cx="5212080" cy="1691640"/>
+            <a:off x="777240" y="3794760"/>
+            <a:ext cx="10607040" cy="731520"/>
           </a:xfrm>
           <a:prstGeom prst="roundRect">
             <a:avLst/>
@@ -3794,14 +3822,14 @@
       </p:sp>
       <p:sp>
         <p:nvSpPr>
-          <p:cNvPr id="11" name="TextBox 10"/>
+          <p:cNvPr id="12" name="TextBox 11"/>
           <p:cNvSpPr txBox="1"/>
           <p:nvPr/>
         </p:nvSpPr>
         <p:spPr>
           <a:xfrm>
-            <a:off x="1051560" y="4389120"/>
-            <a:ext cx="4663440" cy="457200"/>
+            <a:off x="1051560" y="3904488"/>
+            <a:ext cx="10058400" cy="292608"/>
           </a:xfrm>
           <a:prstGeom prst="rect">
             <a:avLst/>
@@ -3816,27 +3844,27 @@
           <a:p>
             <a:pPr algn="l"/>
             <a:r>
-              <a:rPr sz="1500" b="1">
+              <a:rPr sz="1400" b="1">
                 <a:solidFill>
                   <a:srgbClr val="10151E"/>
                 </a:solidFill>
                 <a:latin typeface="Trebuchet MS"/>
               </a:rPr>
-              <a:t>Go agentic → Agent Engine</a:t>
-            </a:r>
-          </a:p>
-        </p:txBody>
-      </p:sp>
-      <p:sp>
-        <p:nvSpPr>
-          <p:cNvPr id="12" name="TextBox 11"/>
+              <a:t>Managed Gemini on Vertex — not self-hosted</a:t>
+            </a:r>
+          </a:p>
+        </p:txBody>
+      </p:sp>
+      <p:sp>
+        <p:nvSpPr>
+          <p:cNvPr id="13" name="TextBox 12"/>
           <p:cNvSpPr txBox="1"/>
           <p:nvPr/>
         </p:nvSpPr>
         <p:spPr>
           <a:xfrm>
-            <a:off x="1051560" y="4937759"/>
-            <a:ext cx="4663440" cy="822960"/>
+            <a:off x="1051560" y="4215384"/>
+            <a:ext cx="10058400" cy="274320"/>
           </a:xfrm>
           <a:prstGeom prst="rect">
             <a:avLst/>
@@ -3849,33 +3877,29 @@
           </a:bodyPr>
           <a:lstStyle/>
           <a:p>
-            <a:pPr algn="l">
-              <a:lnSpc>
-                <a:spcPct val="115000"/>
-              </a:lnSpc>
-            </a:pPr>
-            <a:r>
-              <a:rPr sz="1300" b="0">
+            <a:pPr algn="l"/>
+            <a:r>
+              <a:rPr sz="1150" b="0">
                 <a:solidFill>
                   <a:srgbClr val="475569"/>
                 </a:solidFill>
                 <a:latin typeface="Calibri"/>
               </a:rPr>
-              <a:t>when we add tools (live research, image sourcing) or a HITL pause</a:t>
-            </a:r>
-          </a:p>
-        </p:txBody>
-      </p:sp>
-      <p:sp>
-        <p:nvSpPr>
-          <p:cNvPr id="13" name="Rounded Rectangle 12"/>
+              <a:t>ship now at ~$0.01 / brochure with no GPUs to run; revisit fine-tuning only at real volume</a:t>
+            </a:r>
+          </a:p>
+        </p:txBody>
+      </p:sp>
+      <p:sp>
+        <p:nvSpPr>
+          <p:cNvPr id="14" name="Rounded Rectangle 13"/>
           <p:cNvSpPr/>
           <p:nvPr/>
         </p:nvSpPr>
         <p:spPr>
           <a:xfrm>
-            <a:off x="6172200" y="4160520"/>
-            <a:ext cx="5212080" cy="1691640"/>
+            <a:off x="777240" y="4617720"/>
+            <a:ext cx="10607040" cy="731520"/>
           </a:xfrm>
           <a:prstGeom prst="roundRect">
             <a:avLst/>
@@ -3923,14 +3947,14 @@
       </p:sp>
       <p:sp>
         <p:nvSpPr>
-          <p:cNvPr id="14" name="TextBox 13"/>
+          <p:cNvPr id="15" name="TextBox 14"/>
           <p:cNvSpPr txBox="1"/>
           <p:nvPr/>
         </p:nvSpPr>
         <p:spPr>
           <a:xfrm>
-            <a:off x="6446520" y="4389120"/>
-            <a:ext cx="4663440" cy="457200"/>
+            <a:off x="1051560" y="4727448"/>
+            <a:ext cx="10058400" cy="292608"/>
           </a:xfrm>
           <a:prstGeom prst="rect">
             <a:avLst/>
@@ -3945,27 +3969,27 @@
           <a:p>
             <a:pPr algn="l"/>
             <a:r>
-              <a:rPr sz="1500" b="1">
+              <a:rPr sz="1400" b="1">
                 <a:solidFill>
                   <a:srgbClr val="10151E"/>
                 </a:solidFill>
                 <a:latin typeface="Trebuchet MS"/>
               </a:rPr>
-              <a:t>Harden</a:t>
-            </a:r>
-          </a:p>
-        </p:txBody>
-      </p:sp>
-      <p:sp>
-        <p:nvSpPr>
-          <p:cNvPr id="15" name="TextBox 14"/>
+              <a:t>Limits &amp; images enforced in code — not the model</a:t>
+            </a:r>
+          </a:p>
+        </p:txBody>
+      </p:sp>
+      <p:sp>
+        <p:nvSpPr>
+          <p:cNvPr id="16" name="TextBox 15"/>
           <p:cNvSpPr txBox="1"/>
           <p:nvPr/>
         </p:nvSpPr>
         <p:spPr>
           <a:xfrm>
-            <a:off x="6446520" y="4937759"/>
-            <a:ext cx="4663440" cy="822960"/>
+            <a:off x="1051560" y="5038344"/>
+            <a:ext cx="10058400" cy="274320"/>
           </a:xfrm>
           <a:prstGeom prst="rect">
             <a:avLst/>
@@ -3978,33 +4002,84 @@
           </a:bodyPr>
           <a:lstStyle/>
           <a:p>
-            <a:pPr algn="l">
-              <a:lnSpc>
-                <a:spcPct val="115000"/>
-              </a:lnSpc>
-            </a:pPr>
-            <a:r>
-              <a:rPr sz="1300" b="0">
+            <a:pPr algn="l"/>
+            <a:r>
+              <a:rPr sz="1150" b="0">
                 <a:solidFill>
                   <a:srgbClr val="475569"/>
                 </a:solidFill>
                 <a:latin typeface="Calibri"/>
               </a:rPr>
-              <a:t>EU-region model residency · tune the faithfulness judge · golden eval set in CI</a:t>
-            </a:r>
-          </a:p>
-        </p:txBody>
-      </p:sp>
-      <p:sp>
-        <p:nvSpPr>
-          <p:cNvPr id="16" name="TextBox 15"/>
+              <a:t>the LLM is great at language, weak at counting/choosing — code owns word limits, image slots, JSON</a:t>
+            </a:r>
+          </a:p>
+        </p:txBody>
+      </p:sp>
+      <p:sp>
+        <p:nvSpPr>
+          <p:cNvPr id="17" name="Rounded Rectangle 16"/>
+          <p:cNvSpPr/>
+          <p:nvPr/>
+        </p:nvSpPr>
+        <p:spPr>
+          <a:xfrm>
+            <a:off x="777240" y="5440680"/>
+            <a:ext cx="10607040" cy="731520"/>
+          </a:xfrm>
+          <a:prstGeom prst="roundRect">
+            <a:avLst/>
+          </a:prstGeom>
+          <a:solidFill>
+            <a:srgbClr val="F4F6F9"/>
+          </a:solidFill>
+          <a:ln w="12700">
+            <a:solidFill>
+              <a:srgbClr val="D7DEEA"/>
+            </a:solidFill>
+          </a:ln>
+          <a:effectLst/>
+        </p:spPr>
+        <p:style>
+          <a:lnRef idx="1">
+            <a:schemeClr val="accent1"/>
+          </a:lnRef>
+          <a:fillRef idx="3">
+            <a:schemeClr val="accent1"/>
+          </a:fillRef>
+          <a:effectRef idx="2">
+            <a:schemeClr val="accent1"/>
+          </a:effectRef>
+          <a:fontRef idx="minor">
+            <a:schemeClr val="lt1"/>
+          </a:fontRef>
+        </p:style>
+        <p:txBody>
+          <a:bodyPr rtlCol="0" anchor="ctr" wrap="square" lIns="73152" rIns="73152" tIns="36576" bIns="36576"/>
+          <a:lstStyle/>
+          <a:p>
+            <a:pPr algn="ctr"/>
+            <a:r>
+              <a:rPr sz="1200" b="1">
+                <a:solidFill>
+                  <a:srgbClr val="10151E"/>
+                </a:solidFill>
+                <a:latin typeface="Calibri"/>
+              </a:rPr>
+              <a:t/>
+            </a:r>
+          </a:p>
+        </p:txBody>
+      </p:sp>
+      <p:sp>
+        <p:nvSpPr>
+          <p:cNvPr id="18" name="TextBox 17"/>
           <p:cNvSpPr txBox="1"/>
           <p:nvPr/>
         </p:nvSpPr>
         <p:spPr>
           <a:xfrm>
-            <a:off x="777240" y="6473952"/>
-            <a:ext cx="9144000" cy="274320"/>
+            <a:off x="1051560" y="5550408"/>
+            <a:ext cx="10058400" cy="292608"/>
           </a:xfrm>
           <a:prstGeom prst="rect">
             <a:avLst/>
@@ -4019,27 +4094,27 @@
           <a:p>
             <a:pPr algn="l"/>
             <a:r>
-              <a:rPr sz="900" b="0">
-                <a:solidFill>
-                  <a:srgbClr val="64748B"/>
-                </a:solidFill>
-                <a:latin typeface="Consolas"/>
-              </a:rPr>
-              <a:t>ML6 — Senior AI Engineer Challenge  ·  Case 2 · GenAI collateral</a:t>
-            </a:r>
-          </a:p>
-        </p:txBody>
-      </p:sp>
-      <p:sp>
-        <p:nvSpPr>
-          <p:cNvPr id="17" name="TextBox 16"/>
+              <a:rPr sz="1400" b="1">
+                <a:solidFill>
+                  <a:srgbClr val="10151E"/>
+                </a:solidFill>
+                <a:latin typeface="Trebuchet MS"/>
+              </a:rPr>
+              <a:t>Cloud Run — not GKE or Agent Engine</a:t>
+            </a:r>
+          </a:p>
+        </p:txBody>
+      </p:sp>
+      <p:sp>
+        <p:nvSpPr>
+          <p:cNvPr id="19" name="TextBox 18"/>
           <p:cNvSpPr txBox="1"/>
           <p:nvPr/>
         </p:nvSpPr>
         <p:spPr>
           <a:xfrm>
-            <a:off x="11338560" y="6473952"/>
-            <a:ext cx="457200" cy="274320"/>
+            <a:off x="1051560" y="5861304"/>
+            <a:ext cx="10058400" cy="274320"/>
           </a:xfrm>
           <a:prstGeom prst="rect">
             <a:avLst/>
@@ -4052,6 +4127,76 @@
           </a:bodyPr>
           <a:lstStyle/>
           <a:p>
+            <a:pPr algn="l"/>
+            <a:r>
+              <a:rPr sz="1150" b="0">
+                <a:solidFill>
+                  <a:srgbClr val="475569"/>
+                </a:solidFill>
+                <a:latin typeface="Calibri"/>
+              </a:rPr>
+              <a:t>stateless + tool-less → scale-to-zero, a tiny blast radius and minimal ops</a:t>
+            </a:r>
+          </a:p>
+        </p:txBody>
+      </p:sp>
+      <p:sp>
+        <p:nvSpPr>
+          <p:cNvPr id="20" name="TextBox 19"/>
+          <p:cNvSpPr txBox="1"/>
+          <p:nvPr/>
+        </p:nvSpPr>
+        <p:spPr>
+          <a:xfrm>
+            <a:off x="777240" y="6473952"/>
+            <a:ext cx="9144000" cy="274320"/>
+          </a:xfrm>
+          <a:prstGeom prst="rect">
+            <a:avLst/>
+          </a:prstGeom>
+          <a:noFill/>
+        </p:spPr>
+        <p:txBody>
+          <a:bodyPr wrap="square" anchor="t" lIns="0" rIns="0" tIns="0" bIns="0">
+            <a:spAutoFit/>
+          </a:bodyPr>
+          <a:lstStyle/>
+          <a:p>
+            <a:pPr algn="l"/>
+            <a:r>
+              <a:rPr sz="900" b="0">
+                <a:solidFill>
+                  <a:srgbClr val="64748B"/>
+                </a:solidFill>
+                <a:latin typeface="Consolas"/>
+              </a:rPr>
+              <a:t>ML6 — Senior AI Engineer Challenge  ·  Case 2 · GenAI collateral</a:t>
+            </a:r>
+          </a:p>
+        </p:txBody>
+      </p:sp>
+      <p:sp>
+        <p:nvSpPr>
+          <p:cNvPr id="21" name="TextBox 20"/>
+          <p:cNvSpPr txBox="1"/>
+          <p:nvPr/>
+        </p:nvSpPr>
+        <p:spPr>
+          <a:xfrm>
+            <a:off x="11338560" y="6473952"/>
+            <a:ext cx="457200" cy="274320"/>
+          </a:xfrm>
+          <a:prstGeom prst="rect">
+            <a:avLst/>
+          </a:prstGeom>
+          <a:noFill/>
+        </p:spPr>
+        <p:txBody>
+          <a:bodyPr wrap="square" anchor="t" lIns="0" rIns="0" tIns="0" bIns="0">
+            <a:spAutoFit/>
+          </a:bodyPr>
+          <a:lstStyle/>
+          <a:p>
             <a:pPr algn="r"/>
             <a:r>
               <a:rPr sz="900" b="0">
@@ -4061,6 +4206,848 @@
                 <a:latin typeface="Consolas"/>
               </a:rPr>
               <a:t>10</a:t>
+            </a:r>
+          </a:p>
+        </p:txBody>
+      </p:sp>
+    </p:spTree>
+  </p:cSld>
+  <p:clrMapOvr>
+    <a:masterClrMapping/>
+  </p:clrMapOvr>
+</p:sld>
+</file>
+
+<file path=ppt/slides/slide11.xml><?xml version="1.0" encoding="utf-8"?>
+<p:sld xmlns:a="http://schemas.openxmlformats.org/drawingml/2006/main" xmlns:p="http://schemas.openxmlformats.org/presentationml/2006/main" xmlns:r="http://schemas.openxmlformats.org/officeDocument/2006/relationships">
+  <p:cSld>
+    <p:bg>
+      <p:bgPr>
+        <a:solidFill>
+          <a:srgbClr val="FFFFFF"/>
+        </a:solidFill>
+        <a:effectLst/>
+      </p:bgPr>
+    </p:bg>
+    <p:spTree>
+      <p:nvGrpSpPr>
+        <p:cNvPr id="1" name=""/>
+        <p:cNvGrpSpPr/>
+        <p:nvPr/>
+      </p:nvGrpSpPr>
+      <p:grpSpPr/>
+      <p:sp>
+        <p:nvSpPr>
+          <p:cNvPr id="2" name="TextBox 1"/>
+          <p:cNvSpPr txBox="1"/>
+          <p:nvPr/>
+        </p:nvSpPr>
+        <p:spPr>
+          <a:xfrm>
+            <a:off x="777240" y="502920"/>
+            <a:ext cx="10058400" cy="274320"/>
+          </a:xfrm>
+          <a:prstGeom prst="rect">
+            <a:avLst/>
+          </a:prstGeom>
+          <a:noFill/>
+        </p:spPr>
+        <p:txBody>
+          <a:bodyPr wrap="square" anchor="t" lIns="0" rIns="0" tIns="0" bIns="0">
+            <a:spAutoFit/>
+          </a:bodyPr>
+          <a:lstStyle/>
+          <a:p>
+            <a:pPr algn="l"/>
+            <a:r>
+              <a:rPr sz="1200" b="1" spc="260">
+                <a:solidFill>
+                  <a:srgbClr val="0FB5A6"/>
+                </a:solidFill>
+                <a:latin typeface="Consolas"/>
+              </a:rPr>
+              <a:t>ROADMAP &amp; TRADE-OFFS</a:t>
+            </a:r>
+          </a:p>
+        </p:txBody>
+      </p:sp>
+      <p:sp>
+        <p:nvSpPr>
+          <p:cNvPr id="3" name="TextBox 2"/>
+          <p:cNvSpPr txBox="1"/>
+          <p:nvPr/>
+        </p:nvSpPr>
+        <p:spPr>
+          <a:xfrm>
+            <a:off x="749808" y="868680"/>
+            <a:ext cx="10607040" cy="1005840"/>
+          </a:xfrm>
+          <a:prstGeom prst="rect">
+            <a:avLst/>
+          </a:prstGeom>
+          <a:noFill/>
+        </p:spPr>
+        <p:txBody>
+          <a:bodyPr wrap="square" anchor="t" lIns="0" rIns="0" tIns="0" bIns="0">
+            <a:spAutoFit/>
+          </a:bodyPr>
+          <a:lstStyle/>
+          <a:p>
+            <a:pPr algn="l">
+              <a:lnSpc>
+                <a:spcPct val="102000"/>
+              </a:lnSpc>
+            </a:pPr>
+            <a:r>
+              <a:rPr sz="3000" b="1">
+                <a:solidFill>
+                  <a:srgbClr val="10151E"/>
+                </a:solidFill>
+                <a:latin typeface="Trebuchet MS"/>
+              </a:rPr>
+              <a:t>A working slice today — a clear path to scale</a:t>
+            </a:r>
+          </a:p>
+        </p:txBody>
+      </p:sp>
+      <p:sp>
+        <p:nvSpPr>
+          <p:cNvPr id="4" name="Rounded Rectangle 3"/>
+          <p:cNvSpPr/>
+          <p:nvPr/>
+        </p:nvSpPr>
+        <p:spPr>
+          <a:xfrm>
+            <a:off x="777240" y="2148840"/>
+            <a:ext cx="5212080" cy="1828800"/>
+          </a:xfrm>
+          <a:prstGeom prst="roundRect">
+            <a:avLst/>
+          </a:prstGeom>
+          <a:solidFill>
+            <a:srgbClr val="F4F6F9"/>
+          </a:solidFill>
+          <a:ln w="12700">
+            <a:solidFill>
+              <a:srgbClr val="D7DEEA"/>
+            </a:solidFill>
+          </a:ln>
+          <a:effectLst/>
+        </p:spPr>
+        <p:style>
+          <a:lnRef idx="1">
+            <a:schemeClr val="accent1"/>
+          </a:lnRef>
+          <a:fillRef idx="3">
+            <a:schemeClr val="accent1"/>
+          </a:fillRef>
+          <a:effectRef idx="2">
+            <a:schemeClr val="accent1"/>
+          </a:effectRef>
+          <a:fontRef idx="minor">
+            <a:schemeClr val="lt1"/>
+          </a:fontRef>
+        </p:style>
+        <p:txBody>
+          <a:bodyPr rtlCol="0" anchor="ctr" wrap="square" lIns="73152" rIns="73152" tIns="36576" bIns="36576"/>
+          <a:lstStyle/>
+          <a:p>
+            <a:pPr algn="ctr"/>
+            <a:r>
+              <a:rPr sz="1200" b="1">
+                <a:solidFill>
+                  <a:srgbClr val="10151E"/>
+                </a:solidFill>
+                <a:latin typeface="Calibri"/>
+              </a:rPr>
+              <a:t/>
+            </a:r>
+          </a:p>
+        </p:txBody>
+      </p:sp>
+      <p:sp>
+        <p:nvSpPr>
+          <p:cNvPr id="5" name="TextBox 4"/>
+          <p:cNvSpPr txBox="1"/>
+          <p:nvPr/>
+        </p:nvSpPr>
+        <p:spPr>
+          <a:xfrm>
+            <a:off x="1051560" y="2331720"/>
+            <a:ext cx="4663440" cy="365760"/>
+          </a:xfrm>
+          <a:prstGeom prst="rect">
+            <a:avLst/>
+          </a:prstGeom>
+          <a:noFill/>
+        </p:spPr>
+        <p:txBody>
+          <a:bodyPr wrap="square" anchor="t" lIns="0" rIns="0" tIns="0" bIns="0">
+            <a:spAutoFit/>
+          </a:bodyPr>
+          <a:lstStyle/>
+          <a:p>
+            <a:pPr algn="l"/>
+            <a:r>
+              <a:rPr sz="1500" b="1">
+                <a:solidFill>
+                  <a:srgbClr val="10151E"/>
+                </a:solidFill>
+                <a:latin typeface="Trebuchet MS"/>
+              </a:rPr>
+              <a:t>Multi-tenancy</a:t>
+            </a:r>
+          </a:p>
+        </p:txBody>
+      </p:sp>
+      <p:sp>
+        <p:nvSpPr>
+          <p:cNvPr id="6" name="TextBox 5"/>
+          <p:cNvSpPr txBox="1"/>
+          <p:nvPr/>
+        </p:nvSpPr>
+        <p:spPr>
+          <a:xfrm>
+            <a:off x="1051560" y="2734056"/>
+            <a:ext cx="4663440" cy="640080"/>
+          </a:xfrm>
+          <a:prstGeom prst="rect">
+            <a:avLst/>
+          </a:prstGeom>
+          <a:noFill/>
+        </p:spPr>
+        <p:txBody>
+          <a:bodyPr wrap="square" anchor="t" lIns="0" rIns="0" tIns="0" bIns="0">
+            <a:spAutoFit/>
+          </a:bodyPr>
+          <a:lstStyle/>
+          <a:p>
+            <a:pPr algn="l">
+              <a:lnSpc>
+                <a:spcPct val="112000"/>
+              </a:lnSpc>
+            </a:pPr>
+            <a:r>
+              <a:rPr sz="1250" b="0">
+                <a:solidFill>
+                  <a:srgbClr val="475569"/>
+                </a:solidFill>
+                <a:latin typeface="Calibri"/>
+              </a:rPr>
+              <a:t>tenant from the token; per-tenant CMEK + budgets</a:t>
+            </a:r>
+          </a:p>
+        </p:txBody>
+      </p:sp>
+      <p:sp>
+        <p:nvSpPr>
+          <p:cNvPr id="7" name="TextBox 6"/>
+          <p:cNvSpPr txBox="1"/>
+          <p:nvPr/>
+        </p:nvSpPr>
+        <p:spPr>
+          <a:xfrm>
+            <a:off x="1051560" y="3447288"/>
+            <a:ext cx="4663440" cy="457200"/>
+          </a:xfrm>
+          <a:prstGeom prst="rect">
+            <a:avLst/>
+          </a:prstGeom>
+          <a:noFill/>
+        </p:spPr>
+        <p:txBody>
+          <a:bodyPr wrap="square" anchor="t" lIns="0" rIns="0" tIns="0" bIns="0">
+            <a:spAutoFit/>
+          </a:bodyPr>
+          <a:lstStyle/>
+          <a:p>
+            <a:pPr algn="l">
+              <a:lnSpc>
+                <a:spcPct val="110000"/>
+              </a:lnSpc>
+            </a:pPr>
+            <a:r>
+              <a:rPr sz="1100" b="0">
+                <a:solidFill>
+                  <a:srgbClr val="E0A23E"/>
+                </a:solidFill>
+                <a:latin typeface="Calibri"/>
+              </a:rPr>
+              <a:t>trade-off:  single-tenant ships now — keys already threaded, so it's config not a refactor</a:t>
+            </a:r>
+          </a:p>
+        </p:txBody>
+      </p:sp>
+      <p:sp>
+        <p:nvSpPr>
+          <p:cNvPr id="8" name="Rounded Rectangle 7"/>
+          <p:cNvSpPr/>
+          <p:nvPr/>
+        </p:nvSpPr>
+        <p:spPr>
+          <a:xfrm>
+            <a:off x="6172200" y="2148840"/>
+            <a:ext cx="5212080" cy="1828800"/>
+          </a:xfrm>
+          <a:prstGeom prst="roundRect">
+            <a:avLst/>
+          </a:prstGeom>
+          <a:solidFill>
+            <a:srgbClr val="F4F6F9"/>
+          </a:solidFill>
+          <a:ln w="12700">
+            <a:solidFill>
+              <a:srgbClr val="D7DEEA"/>
+            </a:solidFill>
+          </a:ln>
+          <a:effectLst/>
+        </p:spPr>
+        <p:style>
+          <a:lnRef idx="1">
+            <a:schemeClr val="accent1"/>
+          </a:lnRef>
+          <a:fillRef idx="3">
+            <a:schemeClr val="accent1"/>
+          </a:fillRef>
+          <a:effectRef idx="2">
+            <a:schemeClr val="accent1"/>
+          </a:effectRef>
+          <a:fontRef idx="minor">
+            <a:schemeClr val="lt1"/>
+          </a:fontRef>
+        </p:style>
+        <p:txBody>
+          <a:bodyPr rtlCol="0" anchor="ctr" wrap="square" lIns="73152" rIns="73152" tIns="36576" bIns="36576"/>
+          <a:lstStyle/>
+          <a:p>
+            <a:pPr algn="ctr"/>
+            <a:r>
+              <a:rPr sz="1200" b="1">
+                <a:solidFill>
+                  <a:srgbClr val="10151E"/>
+                </a:solidFill>
+                <a:latin typeface="Calibri"/>
+              </a:rPr>
+              <a:t/>
+            </a:r>
+          </a:p>
+        </p:txBody>
+      </p:sp>
+      <p:sp>
+        <p:nvSpPr>
+          <p:cNvPr id="9" name="TextBox 8"/>
+          <p:cNvSpPr txBox="1"/>
+          <p:nvPr/>
+        </p:nvSpPr>
+        <p:spPr>
+          <a:xfrm>
+            <a:off x="6446520" y="2331720"/>
+            <a:ext cx="4663440" cy="365760"/>
+          </a:xfrm>
+          <a:prstGeom prst="rect">
+            <a:avLst/>
+          </a:prstGeom>
+          <a:noFill/>
+        </p:spPr>
+        <p:txBody>
+          <a:bodyPr wrap="square" anchor="t" lIns="0" rIns="0" tIns="0" bIns="0">
+            <a:spAutoFit/>
+          </a:bodyPr>
+          <a:lstStyle/>
+          <a:p>
+            <a:pPr algn="l"/>
+            <a:r>
+              <a:rPr sz="1500" b="1">
+                <a:solidFill>
+                  <a:srgbClr val="10151E"/>
+                </a:solidFill>
+                <a:latin typeface="Trebuchet MS"/>
+              </a:rPr>
+              <a:t>Org dashboard</a:t>
+            </a:r>
+          </a:p>
+        </p:txBody>
+      </p:sp>
+      <p:sp>
+        <p:nvSpPr>
+          <p:cNvPr id="10" name="TextBox 9"/>
+          <p:cNvSpPr txBox="1"/>
+          <p:nvPr/>
+        </p:nvSpPr>
+        <p:spPr>
+          <a:xfrm>
+            <a:off x="6446520" y="2734056"/>
+            <a:ext cx="4663440" cy="640080"/>
+          </a:xfrm>
+          <a:prstGeom prst="rect">
+            <a:avLst/>
+          </a:prstGeom>
+          <a:noFill/>
+        </p:spPr>
+        <p:txBody>
+          <a:bodyPr wrap="square" anchor="t" lIns="0" rIns="0" tIns="0" bIns="0">
+            <a:spAutoFit/>
+          </a:bodyPr>
+          <a:lstStyle/>
+          <a:p>
+            <a:pPr algn="l">
+              <a:lnSpc>
+                <a:spcPct val="112000"/>
+              </a:lnSpc>
+            </a:pPr>
+            <a:r>
+              <a:rPr sz="1250" b="0">
+                <a:solidFill>
+                  <a:srgbClr val="475569"/>
+                </a:solidFill>
+                <a:latin typeface="Calibri"/>
+              </a:rPr>
+              <a:t>every generation → BigQuery → Looker (cost, groundedness, throughput)</a:t>
+            </a:r>
+          </a:p>
+        </p:txBody>
+      </p:sp>
+      <p:sp>
+        <p:nvSpPr>
+          <p:cNvPr id="11" name="TextBox 10"/>
+          <p:cNvSpPr txBox="1"/>
+          <p:nvPr/>
+        </p:nvSpPr>
+        <p:spPr>
+          <a:xfrm>
+            <a:off x="6446520" y="3447288"/>
+            <a:ext cx="4663440" cy="457200"/>
+          </a:xfrm>
+          <a:prstGeom prst="rect">
+            <a:avLst/>
+          </a:prstGeom>
+          <a:noFill/>
+        </p:spPr>
+        <p:txBody>
+          <a:bodyPr wrap="square" anchor="t" lIns="0" rIns="0" tIns="0" bIns="0">
+            <a:spAutoFit/>
+          </a:bodyPr>
+          <a:lstStyle/>
+          <a:p>
+            <a:pPr algn="l">
+              <a:lnSpc>
+                <a:spcPct val="110000"/>
+              </a:lnSpc>
+            </a:pPr>
+            <a:r>
+              <a:rPr sz="1100" b="0">
+                <a:solidFill>
+                  <a:srgbClr val="E0A23E"/>
+                </a:solidFill>
+                <a:latin typeface="Calibri"/>
+              </a:rPr>
+              <a:t>trade-off:  the BigQuery export is built — only the Looker wiring is left</a:t>
+            </a:r>
+          </a:p>
+        </p:txBody>
+      </p:sp>
+      <p:sp>
+        <p:nvSpPr>
+          <p:cNvPr id="12" name="Rounded Rectangle 11"/>
+          <p:cNvSpPr/>
+          <p:nvPr/>
+        </p:nvSpPr>
+        <p:spPr>
+          <a:xfrm>
+            <a:off x="777240" y="4114800"/>
+            <a:ext cx="5212080" cy="1828800"/>
+          </a:xfrm>
+          <a:prstGeom prst="roundRect">
+            <a:avLst/>
+          </a:prstGeom>
+          <a:solidFill>
+            <a:srgbClr val="F4F6F9"/>
+          </a:solidFill>
+          <a:ln w="12700">
+            <a:solidFill>
+              <a:srgbClr val="D7DEEA"/>
+            </a:solidFill>
+          </a:ln>
+          <a:effectLst/>
+        </p:spPr>
+        <p:style>
+          <a:lnRef idx="1">
+            <a:schemeClr val="accent1"/>
+          </a:lnRef>
+          <a:fillRef idx="3">
+            <a:schemeClr val="accent1"/>
+          </a:fillRef>
+          <a:effectRef idx="2">
+            <a:schemeClr val="accent1"/>
+          </a:effectRef>
+          <a:fontRef idx="minor">
+            <a:schemeClr val="lt1"/>
+          </a:fontRef>
+        </p:style>
+        <p:txBody>
+          <a:bodyPr rtlCol="0" anchor="ctr" wrap="square" lIns="73152" rIns="73152" tIns="36576" bIns="36576"/>
+          <a:lstStyle/>
+          <a:p>
+            <a:pPr algn="ctr"/>
+            <a:r>
+              <a:rPr sz="1200" b="1">
+                <a:solidFill>
+                  <a:srgbClr val="10151E"/>
+                </a:solidFill>
+                <a:latin typeface="Calibri"/>
+              </a:rPr>
+              <a:t/>
+            </a:r>
+          </a:p>
+        </p:txBody>
+      </p:sp>
+      <p:sp>
+        <p:nvSpPr>
+          <p:cNvPr id="13" name="TextBox 12"/>
+          <p:cNvSpPr txBox="1"/>
+          <p:nvPr/>
+        </p:nvSpPr>
+        <p:spPr>
+          <a:xfrm>
+            <a:off x="1051560" y="4297680"/>
+            <a:ext cx="4663440" cy="365760"/>
+          </a:xfrm>
+          <a:prstGeom prst="rect">
+            <a:avLst/>
+          </a:prstGeom>
+          <a:noFill/>
+        </p:spPr>
+        <p:txBody>
+          <a:bodyPr wrap="square" anchor="t" lIns="0" rIns="0" tIns="0" bIns="0">
+            <a:spAutoFit/>
+          </a:bodyPr>
+          <a:lstStyle/>
+          <a:p>
+            <a:pPr algn="l"/>
+            <a:r>
+              <a:rPr sz="1500" b="1">
+                <a:solidFill>
+                  <a:srgbClr val="10151E"/>
+                </a:solidFill>
+                <a:latin typeface="Trebuchet MS"/>
+              </a:rPr>
+              <a:t>Go agentic → Agent Engine</a:t>
+            </a:r>
+          </a:p>
+        </p:txBody>
+      </p:sp>
+      <p:sp>
+        <p:nvSpPr>
+          <p:cNvPr id="14" name="TextBox 13"/>
+          <p:cNvSpPr txBox="1"/>
+          <p:nvPr/>
+        </p:nvSpPr>
+        <p:spPr>
+          <a:xfrm>
+            <a:off x="1051560" y="4700016"/>
+            <a:ext cx="4663440" cy="640080"/>
+          </a:xfrm>
+          <a:prstGeom prst="rect">
+            <a:avLst/>
+          </a:prstGeom>
+          <a:noFill/>
+        </p:spPr>
+        <p:txBody>
+          <a:bodyPr wrap="square" anchor="t" lIns="0" rIns="0" tIns="0" bIns="0">
+            <a:spAutoFit/>
+          </a:bodyPr>
+          <a:lstStyle/>
+          <a:p>
+            <a:pPr algn="l">
+              <a:lnSpc>
+                <a:spcPct val="112000"/>
+              </a:lnSpc>
+            </a:pPr>
+            <a:r>
+              <a:rPr sz="1250" b="0">
+                <a:solidFill>
+                  <a:srgbClr val="475569"/>
+                </a:solidFill>
+                <a:latin typeface="Calibri"/>
+              </a:rPr>
+              <a:t>tools (live research, image sourcing) or a HITL pause</a:t>
+            </a:r>
+          </a:p>
+        </p:txBody>
+      </p:sp>
+      <p:sp>
+        <p:nvSpPr>
+          <p:cNvPr id="15" name="TextBox 14"/>
+          <p:cNvSpPr txBox="1"/>
+          <p:nvPr/>
+        </p:nvSpPr>
+        <p:spPr>
+          <a:xfrm>
+            <a:off x="1051560" y="5413248"/>
+            <a:ext cx="4663440" cy="457200"/>
+          </a:xfrm>
+          <a:prstGeom prst="rect">
+            <a:avLst/>
+          </a:prstGeom>
+          <a:noFill/>
+        </p:spPr>
+        <p:txBody>
+          <a:bodyPr wrap="square" anchor="t" lIns="0" rIns="0" tIns="0" bIns="0">
+            <a:spAutoFit/>
+          </a:bodyPr>
+          <a:lstStyle/>
+          <a:p>
+            <a:pPr algn="l">
+              <a:lnSpc>
+                <a:spcPct val="110000"/>
+              </a:lnSpc>
+            </a:pPr>
+            <a:r>
+              <a:rPr sz="1100" b="0">
+                <a:solidFill>
+                  <a:srgbClr val="E0A23E"/>
+                </a:solidFill>
+                <a:latin typeface="Calibri"/>
+              </a:rPr>
+              <a:t>trade-off:  agents add cost + opacity — not until there are real tools to call</a:t>
+            </a:r>
+          </a:p>
+        </p:txBody>
+      </p:sp>
+      <p:sp>
+        <p:nvSpPr>
+          <p:cNvPr id="16" name="Rounded Rectangle 15"/>
+          <p:cNvSpPr/>
+          <p:nvPr/>
+        </p:nvSpPr>
+        <p:spPr>
+          <a:xfrm>
+            <a:off x="6172200" y="4114800"/>
+            <a:ext cx="5212080" cy="1828800"/>
+          </a:xfrm>
+          <a:prstGeom prst="roundRect">
+            <a:avLst/>
+          </a:prstGeom>
+          <a:solidFill>
+            <a:srgbClr val="F4F6F9"/>
+          </a:solidFill>
+          <a:ln w="12700">
+            <a:solidFill>
+              <a:srgbClr val="D7DEEA"/>
+            </a:solidFill>
+          </a:ln>
+          <a:effectLst/>
+        </p:spPr>
+        <p:style>
+          <a:lnRef idx="1">
+            <a:schemeClr val="accent1"/>
+          </a:lnRef>
+          <a:fillRef idx="3">
+            <a:schemeClr val="accent1"/>
+          </a:fillRef>
+          <a:effectRef idx="2">
+            <a:schemeClr val="accent1"/>
+          </a:effectRef>
+          <a:fontRef idx="minor">
+            <a:schemeClr val="lt1"/>
+          </a:fontRef>
+        </p:style>
+        <p:txBody>
+          <a:bodyPr rtlCol="0" anchor="ctr" wrap="square" lIns="73152" rIns="73152" tIns="36576" bIns="36576"/>
+          <a:lstStyle/>
+          <a:p>
+            <a:pPr algn="ctr"/>
+            <a:r>
+              <a:rPr sz="1200" b="1">
+                <a:solidFill>
+                  <a:srgbClr val="10151E"/>
+                </a:solidFill>
+                <a:latin typeface="Calibri"/>
+              </a:rPr>
+              <a:t/>
+            </a:r>
+          </a:p>
+        </p:txBody>
+      </p:sp>
+      <p:sp>
+        <p:nvSpPr>
+          <p:cNvPr id="17" name="TextBox 16"/>
+          <p:cNvSpPr txBox="1"/>
+          <p:nvPr/>
+        </p:nvSpPr>
+        <p:spPr>
+          <a:xfrm>
+            <a:off x="6446520" y="4297680"/>
+            <a:ext cx="4663440" cy="365760"/>
+          </a:xfrm>
+          <a:prstGeom prst="rect">
+            <a:avLst/>
+          </a:prstGeom>
+          <a:noFill/>
+        </p:spPr>
+        <p:txBody>
+          <a:bodyPr wrap="square" anchor="t" lIns="0" rIns="0" tIns="0" bIns="0">
+            <a:spAutoFit/>
+          </a:bodyPr>
+          <a:lstStyle/>
+          <a:p>
+            <a:pPr algn="l"/>
+            <a:r>
+              <a:rPr sz="1500" b="1">
+                <a:solidFill>
+                  <a:srgbClr val="10151E"/>
+                </a:solidFill>
+                <a:latin typeface="Trebuchet MS"/>
+              </a:rPr>
+              <a:t>Harden</a:t>
+            </a:r>
+          </a:p>
+        </p:txBody>
+      </p:sp>
+      <p:sp>
+        <p:nvSpPr>
+          <p:cNvPr id="18" name="TextBox 17"/>
+          <p:cNvSpPr txBox="1"/>
+          <p:nvPr/>
+        </p:nvSpPr>
+        <p:spPr>
+          <a:xfrm>
+            <a:off x="6446520" y="4700016"/>
+            <a:ext cx="4663440" cy="640080"/>
+          </a:xfrm>
+          <a:prstGeom prst="rect">
+            <a:avLst/>
+          </a:prstGeom>
+          <a:noFill/>
+        </p:spPr>
+        <p:txBody>
+          <a:bodyPr wrap="square" anchor="t" lIns="0" rIns="0" tIns="0" bIns="0">
+            <a:spAutoFit/>
+          </a:bodyPr>
+          <a:lstStyle/>
+          <a:p>
+            <a:pPr algn="l">
+              <a:lnSpc>
+                <a:spcPct val="112000"/>
+              </a:lnSpc>
+            </a:pPr>
+            <a:r>
+              <a:rPr sz="1250" b="0">
+                <a:solidFill>
+                  <a:srgbClr val="475569"/>
+                </a:solidFill>
+                <a:latin typeface="Calibri"/>
+              </a:rPr>
+              <a:t>tune the faithfulness judge · golden eval set in CI</a:t>
+            </a:r>
+          </a:p>
+        </p:txBody>
+      </p:sp>
+      <p:sp>
+        <p:nvSpPr>
+          <p:cNvPr id="19" name="TextBox 18"/>
+          <p:cNvSpPr txBox="1"/>
+          <p:nvPr/>
+        </p:nvSpPr>
+        <p:spPr>
+          <a:xfrm>
+            <a:off x="6446520" y="5413248"/>
+            <a:ext cx="4663440" cy="457200"/>
+          </a:xfrm>
+          <a:prstGeom prst="rect">
+            <a:avLst/>
+          </a:prstGeom>
+          <a:noFill/>
+        </p:spPr>
+        <p:txBody>
+          <a:bodyPr wrap="square" anchor="t" lIns="0" rIns="0" tIns="0" bIns="0">
+            <a:spAutoFit/>
+          </a:bodyPr>
+          <a:lstStyle/>
+          <a:p>
+            <a:pPr algn="l">
+              <a:lnSpc>
+                <a:spcPct val="110000"/>
+              </a:lnSpc>
+            </a:pPr>
+            <a:r>
+              <a:rPr sz="1100" b="0">
+                <a:solidFill>
+                  <a:srgbClr val="E0A23E"/>
+                </a:solidFill>
+                <a:latin typeface="Calibri"/>
+              </a:rPr>
+              <a:t>trade-off:  model calls use the global endpoint today — EU residency is the open gap</a:t>
+            </a:r>
+          </a:p>
+        </p:txBody>
+      </p:sp>
+      <p:sp>
+        <p:nvSpPr>
+          <p:cNvPr id="20" name="TextBox 19"/>
+          <p:cNvSpPr txBox="1"/>
+          <p:nvPr/>
+        </p:nvSpPr>
+        <p:spPr>
+          <a:xfrm>
+            <a:off x="777240" y="6473952"/>
+            <a:ext cx="9144000" cy="274320"/>
+          </a:xfrm>
+          <a:prstGeom prst="rect">
+            <a:avLst/>
+          </a:prstGeom>
+          <a:noFill/>
+        </p:spPr>
+        <p:txBody>
+          <a:bodyPr wrap="square" anchor="t" lIns="0" rIns="0" tIns="0" bIns="0">
+            <a:spAutoFit/>
+          </a:bodyPr>
+          <a:lstStyle/>
+          <a:p>
+            <a:pPr algn="l"/>
+            <a:r>
+              <a:rPr sz="900" b="0">
+                <a:solidFill>
+                  <a:srgbClr val="64748B"/>
+                </a:solidFill>
+                <a:latin typeface="Consolas"/>
+              </a:rPr>
+              <a:t>ML6 — Senior AI Engineer Challenge  ·  Case 2 · GenAI collateral</a:t>
+            </a:r>
+          </a:p>
+        </p:txBody>
+      </p:sp>
+      <p:sp>
+        <p:nvSpPr>
+          <p:cNvPr id="21" name="TextBox 20"/>
+          <p:cNvSpPr txBox="1"/>
+          <p:nvPr/>
+        </p:nvSpPr>
+        <p:spPr>
+          <a:xfrm>
+            <a:off x="11338560" y="6473952"/>
+            <a:ext cx="457200" cy="274320"/>
+          </a:xfrm>
+          <a:prstGeom prst="rect">
+            <a:avLst/>
+          </a:prstGeom>
+          <a:noFill/>
+        </p:spPr>
+        <p:txBody>
+          <a:bodyPr wrap="square" anchor="t" lIns="0" rIns="0" tIns="0" bIns="0">
+            <a:spAutoFit/>
+          </a:bodyPr>
+          <a:lstStyle/>
+          <a:p>
+            <a:pPr algn="r"/>
+            <a:r>
+              <a:rPr sz="900" b="0">
+                <a:solidFill>
+                  <a:srgbClr val="64748B"/>
+                </a:solidFill>
+                <a:latin typeface="Consolas"/>
+              </a:rPr>
+              <a:t>11</a:t>
             </a:r>
           </a:p>
         </p:txBody>
@@ -5207,7 +6194,7 @@
                 </a:solidFill>
                 <a:latin typeface="Consolas"/>
               </a:rPr>
-              <a:t>POST /generate  →  202 + job_id  (poll)</a:t>
+              <a:t>POST /generate  →  200  ArticleJSON (sync)</a:t>
             </a:r>
           </a:p>
         </p:txBody>
@@ -7349,14 +8336,60 @@
       </p:cxnSp>
       <p:sp>
         <p:nvSpPr>
-          <p:cNvPr id="16" name="TextBox 15"/>
+          <p:cNvPr id="16" name="Rounded Rectangle 15"/>
+          <p:cNvSpPr/>
+          <p:nvPr/>
+        </p:nvSpPr>
+        <p:spPr>
+          <a:xfrm>
+            <a:off x="777240" y="3246120"/>
+            <a:ext cx="2697480" cy="1554480"/>
+          </a:xfrm>
+          <a:prstGeom prst="roundRect">
+            <a:avLst/>
+          </a:prstGeom>
+          <a:solidFill>
+            <a:srgbClr val="1B2230"/>
+          </a:solidFill>
+          <a:ln w="25400">
+            <a:solidFill>
+              <a:srgbClr val="E0A23E"/>
+            </a:solidFill>
+          </a:ln>
+          <a:effectLst/>
+        </p:spPr>
+        <p:style>
+          <a:lnRef idx="1">
+            <a:schemeClr val="accent1"/>
+          </a:lnRef>
+          <a:fillRef idx="3">
+            <a:schemeClr val="accent1"/>
+          </a:fillRef>
+          <a:effectRef idx="2">
+            <a:schemeClr val="accent1"/>
+          </a:effectRef>
+          <a:fontRef idx="minor">
+            <a:schemeClr val="lt1"/>
+          </a:fontRef>
+        </p:style>
+        <p:txBody>
+          <a:bodyPr rtlCol="0" anchor="ctr"/>
+          <a:lstStyle/>
+          <a:p>
+            <a:pPr algn="ctr"/>
+          </a:p>
+        </p:txBody>
+      </p:sp>
+      <p:sp>
+        <p:nvSpPr>
+          <p:cNvPr id="17" name="TextBox 16"/>
           <p:cNvSpPr txBox="1"/>
           <p:nvPr/>
         </p:nvSpPr>
         <p:spPr>
           <a:xfrm>
-            <a:off x="777240" y="5440680"/>
-            <a:ext cx="10607040" cy="548640"/>
+            <a:off x="987552" y="3401568"/>
+            <a:ext cx="2377440" cy="274320"/>
           </a:xfrm>
           <a:prstGeom prst="rect">
             <a:avLst/>
@@ -7369,33 +8402,29 @@
           </a:bodyPr>
           <a:lstStyle/>
           <a:p>
-            <a:pPr algn="l">
-              <a:lnSpc>
-                <a:spcPct val="120000"/>
-              </a:lnSpc>
-            </a:pPr>
-            <a:r>
-              <a:rPr sz="1200" b="0">
-                <a:solidFill>
-                  <a:srgbClr val="7E8CA0"/>
+            <a:pPr algn="l"/>
+            <a:r>
+              <a:rPr sz="1100" b="1" spc="260">
+                <a:solidFill>
+                  <a:srgbClr val="E0A23E"/>
                 </a:solidFill>
                 <a:latin typeface="Consolas"/>
               </a:rPr>
-              <a:t>Cross-cutting:  Google ID-token auth + IAM   ·   Model Armor   ·   per-tenant CMEK   ·   EU residency   ·   Pub/Sub DLQ   ·   Terraform (infra/)</a:t>
-            </a:r>
-          </a:p>
-        </p:txBody>
-      </p:sp>
-      <p:sp>
-        <p:nvSpPr>
-          <p:cNvPr id="17" name="TextBox 16"/>
+              <a:t>WHY CLOUD RUN</a:t>
+            </a:r>
+          </a:p>
+        </p:txBody>
+      </p:sp>
+      <p:sp>
+        <p:nvSpPr>
+          <p:cNvPr id="18" name="TextBox 17"/>
           <p:cNvSpPr txBox="1"/>
           <p:nvPr/>
         </p:nvSpPr>
         <p:spPr>
           <a:xfrm>
-            <a:off x="777240" y="6473952"/>
-            <a:ext cx="9144000" cy="274320"/>
+            <a:off x="987552" y="3730752"/>
+            <a:ext cx="2331720" cy="1005840"/>
           </a:xfrm>
           <a:prstGeom prst="rect">
             <a:avLst/>
@@ -7408,8 +8437,477 @@
           </a:bodyPr>
           <a:lstStyle/>
           <a:p>
+            <a:pPr algn="l">
+              <a:lnSpc>
+                <a:spcPct val="116000"/>
+              </a:lnSpc>
+            </a:pPr>
+            <a:r>
+              <a:rPr sz="1150" b="0">
+                <a:solidFill>
+                  <a:srgbClr val="C7D0DE"/>
+                </a:solidFill>
+                <a:latin typeface="Calibri"/>
+              </a:rPr>
+              <a:t>Deterministic + tool-less → one stateless service. No agent runtime, no servers — scale-to-zero, tiny blast radius.</a:t>
+            </a:r>
+          </a:p>
+        </p:txBody>
+      </p:sp>
+      <p:cxnSp>
+        <p:nvCxnSpPr>
+          <p:cNvPr id="19" name="Connector 18"/>
+          <p:cNvCxnSpPr/>
+          <p:nvPr/>
+        </p:nvCxnSpPr>
+        <p:spPr>
+          <a:xfrm flipV="1">
+            <a:off x="2240280" y="2578608"/>
+            <a:ext cx="1463040" cy="667512"/>
+          </a:xfrm>
+          <a:prstGeom prst="line">
+            <a:avLst/>
+          </a:prstGeom>
+          <a:ln w="25400">
+            <a:solidFill>
+              <a:srgbClr val="E0A23E"/>
+            </a:solidFill>
+            <a:tailEnd type="triangle" w="med" len="med"/>
+          </a:ln>
+        </p:spPr>
+        <p:style>
+          <a:lnRef idx="2">
+            <a:schemeClr val="accent1"/>
+          </a:lnRef>
+          <a:fillRef idx="0">
+            <a:schemeClr val="accent1"/>
+          </a:fillRef>
+          <a:effectRef idx="1">
+            <a:schemeClr val="accent1"/>
+          </a:effectRef>
+          <a:fontRef idx="minor">
+            <a:schemeClr val="tx1"/>
+          </a:fontRef>
+        </p:style>
+      </p:cxnSp>
+      <p:sp>
+        <p:nvSpPr>
+          <p:cNvPr id="20" name="Rounded Rectangle 19"/>
+          <p:cNvSpPr/>
+          <p:nvPr/>
+        </p:nvSpPr>
+        <p:spPr>
+          <a:xfrm>
+            <a:off x="8778240" y="2852928"/>
+            <a:ext cx="2651760" cy="676656"/>
+          </a:xfrm>
+          <a:prstGeom prst="roundRect">
+            <a:avLst/>
+          </a:prstGeom>
+          <a:solidFill>
+            <a:srgbClr val="1B2230"/>
+          </a:solidFill>
+          <a:ln w="19050">
+            <a:solidFill>
+              <a:srgbClr val="E0A23E"/>
+            </a:solidFill>
+          </a:ln>
+          <a:effectLst/>
+        </p:spPr>
+        <p:style>
+          <a:lnRef idx="1">
+            <a:schemeClr val="accent1"/>
+          </a:lnRef>
+          <a:fillRef idx="3">
+            <a:schemeClr val="accent1"/>
+          </a:fillRef>
+          <a:effectRef idx="2">
+            <a:schemeClr val="accent1"/>
+          </a:effectRef>
+          <a:fontRef idx="minor">
+            <a:schemeClr val="lt1"/>
+          </a:fontRef>
+        </p:style>
+        <p:txBody>
+          <a:bodyPr rtlCol="0" anchor="ctr"/>
+          <a:lstStyle/>
+          <a:p>
+            <a:pPr algn="ctr"/>
+          </a:p>
+        </p:txBody>
+      </p:sp>
+      <p:sp>
+        <p:nvSpPr>
+          <p:cNvPr id="21" name="TextBox 20"/>
+          <p:cNvSpPr txBox="1"/>
+          <p:nvPr/>
+        </p:nvSpPr>
+        <p:spPr>
+          <a:xfrm>
+            <a:off x="8979408" y="2944368"/>
+            <a:ext cx="2377440" cy="256032"/>
+          </a:xfrm>
+          <a:prstGeom prst="rect">
+            <a:avLst/>
+          </a:prstGeom>
+          <a:noFill/>
+        </p:spPr>
+        <p:txBody>
+          <a:bodyPr wrap="square" anchor="t" lIns="0" rIns="0" tIns="0" bIns="0">
+            <a:spAutoFit/>
+          </a:bodyPr>
+          <a:lstStyle/>
+          <a:p>
             <a:pPr algn="l"/>
             <a:r>
+              <a:rPr sz="1000" b="1" spc="260">
+                <a:solidFill>
+                  <a:srgbClr val="E0A23E"/>
+                </a:solidFill>
+                <a:latin typeface="Consolas"/>
+              </a:rPr>
+              <a:t>NO API KEY</a:t>
+            </a:r>
+          </a:p>
+        </p:txBody>
+      </p:sp>
+      <p:sp>
+        <p:nvSpPr>
+          <p:cNvPr id="22" name="TextBox 21"/>
+          <p:cNvSpPr txBox="1"/>
+          <p:nvPr/>
+        </p:nvSpPr>
+        <p:spPr>
+          <a:xfrm>
+            <a:off x="8979408" y="3200400"/>
+            <a:ext cx="2286000" cy="292608"/>
+          </a:xfrm>
+          <a:prstGeom prst="rect">
+            <a:avLst/>
+          </a:prstGeom>
+          <a:noFill/>
+        </p:spPr>
+        <p:txBody>
+          <a:bodyPr wrap="square" anchor="t" lIns="0" rIns="0" tIns="0" bIns="0">
+            <a:spAutoFit/>
+          </a:bodyPr>
+          <a:lstStyle/>
+          <a:p>
+            <a:pPr algn="l">
+              <a:lnSpc>
+                <a:spcPct val="105000"/>
+              </a:lnSpc>
+            </a:pPr>
+            <a:r>
+              <a:rPr sz="1000" b="0">
+                <a:solidFill>
+                  <a:srgbClr val="C7D0DE"/>
+                </a:solidFill>
+                <a:latin typeface="Calibri"/>
+              </a:rPr>
+              <a:t>Vertex via the Cloud Run service account (ADC)</a:t>
+            </a:r>
+          </a:p>
+        </p:txBody>
+      </p:sp>
+      <p:sp>
+        <p:nvSpPr>
+          <p:cNvPr id="23" name="Rounded Rectangle 22"/>
+          <p:cNvSpPr/>
+          <p:nvPr/>
+        </p:nvSpPr>
+        <p:spPr>
+          <a:xfrm>
+            <a:off x="8778240" y="3639312"/>
+            <a:ext cx="2651760" cy="960120"/>
+          </a:xfrm>
+          <a:prstGeom prst="roundRect">
+            <a:avLst/>
+          </a:prstGeom>
+          <a:solidFill>
+            <a:srgbClr val="1B2230"/>
+          </a:solidFill>
+          <a:ln w="19050">
+            <a:solidFill>
+              <a:srgbClr val="E0A23E"/>
+            </a:solidFill>
+          </a:ln>
+          <a:effectLst/>
+        </p:spPr>
+        <p:style>
+          <a:lnRef idx="1">
+            <a:schemeClr val="accent1"/>
+          </a:lnRef>
+          <a:fillRef idx="3">
+            <a:schemeClr val="accent1"/>
+          </a:fillRef>
+          <a:effectRef idx="2">
+            <a:schemeClr val="accent1"/>
+          </a:effectRef>
+          <a:fontRef idx="minor">
+            <a:schemeClr val="lt1"/>
+          </a:fontRef>
+        </p:style>
+        <p:txBody>
+          <a:bodyPr rtlCol="0" anchor="ctr"/>
+          <a:lstStyle/>
+          <a:p>
+            <a:pPr algn="ctr"/>
+          </a:p>
+        </p:txBody>
+      </p:sp>
+      <p:sp>
+        <p:nvSpPr>
+          <p:cNvPr id="24" name="TextBox 23"/>
+          <p:cNvSpPr txBox="1"/>
+          <p:nvPr/>
+        </p:nvSpPr>
+        <p:spPr>
+          <a:xfrm>
+            <a:off x="8979408" y="3730752"/>
+            <a:ext cx="2377440" cy="256032"/>
+          </a:xfrm>
+          <a:prstGeom prst="rect">
+            <a:avLst/>
+          </a:prstGeom>
+          <a:noFill/>
+        </p:spPr>
+        <p:txBody>
+          <a:bodyPr wrap="square" anchor="t" lIns="0" rIns="0" tIns="0" bIns="0">
+            <a:spAutoFit/>
+          </a:bodyPr>
+          <a:lstStyle/>
+          <a:p>
+            <a:pPr algn="l"/>
+            <a:r>
+              <a:rPr sz="1000" b="1" spc="260">
+                <a:solidFill>
+                  <a:srgbClr val="E0A23E"/>
+                </a:solidFill>
+                <a:latin typeface="Consolas"/>
+              </a:rPr>
+              <a:t>ASYNC PARSE</a:t>
+            </a:r>
+          </a:p>
+        </p:txBody>
+      </p:sp>
+      <p:sp>
+        <p:nvSpPr>
+          <p:cNvPr id="25" name="TextBox 24"/>
+          <p:cNvSpPr txBox="1"/>
+          <p:nvPr/>
+        </p:nvSpPr>
+        <p:spPr>
+          <a:xfrm>
+            <a:off x="8979408" y="4005072"/>
+            <a:ext cx="2331720" cy="548640"/>
+          </a:xfrm>
+          <a:prstGeom prst="rect">
+            <a:avLst/>
+          </a:prstGeom>
+          <a:noFill/>
+        </p:spPr>
+        <p:txBody>
+          <a:bodyPr wrap="square" anchor="t" lIns="0" rIns="0" tIns="0" bIns="0">
+            <a:spAutoFit/>
+          </a:bodyPr>
+          <a:lstStyle/>
+          <a:p>
+            <a:pPr algn="l">
+              <a:lnSpc>
+                <a:spcPct val="112000"/>
+              </a:lnSpc>
+            </a:pPr>
+            <a:r>
+              <a:rPr sz="1000" b="0">
+                <a:solidFill>
+                  <a:srgbClr val="C7D0DE"/>
+                </a:solidFill>
+                <a:latin typeface="Calibri"/>
+              </a:rPr>
+              <a:t>Pub/Sub queues parse/upload bursts (+ DLQ), off the request path.</a:t>
+            </a:r>
+          </a:p>
+        </p:txBody>
+      </p:sp>
+      <p:cxnSp>
+        <p:nvCxnSpPr>
+          <p:cNvPr id="26" name="Connector 25"/>
+          <p:cNvCxnSpPr/>
+          <p:nvPr/>
+        </p:nvCxnSpPr>
+        <p:spPr>
+          <a:xfrm flipH="1" flipV="1">
+            <a:off x="8430768" y="3584448"/>
+            <a:ext cx="329184" cy="393191"/>
+          </a:xfrm>
+          <a:prstGeom prst="line">
+            <a:avLst/>
+          </a:prstGeom>
+          <a:ln w="19050">
+            <a:solidFill>
+              <a:srgbClr val="E0A23E"/>
+            </a:solidFill>
+            <a:tailEnd type="triangle" w="med" len="med"/>
+          </a:ln>
+        </p:spPr>
+        <p:style>
+          <a:lnRef idx="2">
+            <a:schemeClr val="accent1"/>
+          </a:lnRef>
+          <a:fillRef idx="0">
+            <a:schemeClr val="accent1"/>
+          </a:fillRef>
+          <a:effectRef idx="1">
+            <a:schemeClr val="accent1"/>
+          </a:effectRef>
+          <a:fontRef idx="minor">
+            <a:schemeClr val="tx1"/>
+          </a:fontRef>
+        </p:style>
+      </p:cxnSp>
+      <p:sp>
+        <p:nvSpPr>
+          <p:cNvPr id="27" name="Rounded Rectangle 26"/>
+          <p:cNvSpPr/>
+          <p:nvPr/>
+        </p:nvSpPr>
+        <p:spPr>
+          <a:xfrm>
+            <a:off x="713232" y="5321808"/>
+            <a:ext cx="10744200" cy="786384"/>
+          </a:xfrm>
+          <a:prstGeom prst="roundRect">
+            <a:avLst/>
+          </a:prstGeom>
+          <a:noFill/>
+          <a:ln w="15875">
+            <a:solidFill>
+              <a:srgbClr val="E0A23E"/>
+            </a:solidFill>
+          </a:ln>
+          <a:effectLst/>
+        </p:spPr>
+        <p:style>
+          <a:lnRef idx="1">
+            <a:schemeClr val="accent1"/>
+          </a:lnRef>
+          <a:fillRef idx="3">
+            <a:schemeClr val="accent1"/>
+          </a:fillRef>
+          <a:effectRef idx="2">
+            <a:schemeClr val="accent1"/>
+          </a:effectRef>
+          <a:fontRef idx="minor">
+            <a:schemeClr val="lt1"/>
+          </a:fontRef>
+        </p:style>
+        <p:txBody>
+          <a:bodyPr rtlCol="0" anchor="ctr"/>
+          <a:lstStyle/>
+          <a:p>
+            <a:pPr algn="ctr"/>
+          </a:p>
+        </p:txBody>
+      </p:sp>
+      <p:sp>
+        <p:nvSpPr>
+          <p:cNvPr id="28" name="TextBox 27"/>
+          <p:cNvSpPr txBox="1"/>
+          <p:nvPr/>
+        </p:nvSpPr>
+        <p:spPr>
+          <a:xfrm>
+            <a:off x="914400" y="5413248"/>
+            <a:ext cx="2743200" cy="274320"/>
+          </a:xfrm>
+          <a:prstGeom prst="rect">
+            <a:avLst/>
+          </a:prstGeom>
+          <a:noFill/>
+        </p:spPr>
+        <p:txBody>
+          <a:bodyPr wrap="square" anchor="t" lIns="0" rIns="0" tIns="0" bIns="0">
+            <a:spAutoFit/>
+          </a:bodyPr>
+          <a:lstStyle/>
+          <a:p>
+            <a:pPr algn="l"/>
+            <a:r>
+              <a:rPr sz="1000" b="1" spc="260">
+                <a:solidFill>
+                  <a:srgbClr val="E0A23E"/>
+                </a:solidFill>
+                <a:latin typeface="Consolas"/>
+              </a:rPr>
+              <a:t>SECURITY SPINE</a:t>
+            </a:r>
+          </a:p>
+        </p:txBody>
+      </p:sp>
+      <p:sp>
+        <p:nvSpPr>
+          <p:cNvPr id="29" name="TextBox 28"/>
+          <p:cNvSpPr txBox="1"/>
+          <p:nvPr/>
+        </p:nvSpPr>
+        <p:spPr>
+          <a:xfrm>
+            <a:off x="914400" y="5724144"/>
+            <a:ext cx="10469880" cy="457200"/>
+          </a:xfrm>
+          <a:prstGeom prst="rect">
+            <a:avLst/>
+          </a:prstGeom>
+          <a:noFill/>
+        </p:spPr>
+        <p:txBody>
+          <a:bodyPr wrap="square" anchor="t" lIns="0" rIns="0" tIns="0" bIns="0">
+            <a:spAutoFit/>
+          </a:bodyPr>
+          <a:lstStyle/>
+          <a:p>
+            <a:pPr algn="l">
+              <a:lnSpc>
+                <a:spcPct val="112000"/>
+              </a:lnSpc>
+            </a:pPr>
+            <a:r>
+              <a:rPr sz="1100" b="0">
+                <a:solidFill>
+                  <a:srgbClr val="9FB0C8"/>
+                </a:solidFill>
+                <a:latin typeface="Consolas"/>
+              </a:rPr>
+              <a:t>Google ID-token auth + IAM   ·   Model Armor   ·   per-tenant CMEK   ·   EU residency   ·   Pub/Sub DLQ   ·   Terraform (infra/)</a:t>
+            </a:r>
+          </a:p>
+        </p:txBody>
+      </p:sp>
+      <p:sp>
+        <p:nvSpPr>
+          <p:cNvPr id="30" name="TextBox 29"/>
+          <p:cNvSpPr txBox="1"/>
+          <p:nvPr/>
+        </p:nvSpPr>
+        <p:spPr>
+          <a:xfrm>
+            <a:off x="777240" y="6473952"/>
+            <a:ext cx="9144000" cy="274320"/>
+          </a:xfrm>
+          <a:prstGeom prst="rect">
+            <a:avLst/>
+          </a:prstGeom>
+          <a:noFill/>
+        </p:spPr>
+        <p:txBody>
+          <a:bodyPr wrap="square" anchor="t" lIns="0" rIns="0" tIns="0" bIns="0">
+            <a:spAutoFit/>
+          </a:bodyPr>
+          <a:lstStyle/>
+          <a:p>
+            <a:pPr algn="l"/>
+            <a:r>
               <a:rPr sz="900" b="0">
                 <a:solidFill>
                   <a:srgbClr val="5A6B82"/>
@@ -7423,7 +8921,7 @@
       </p:sp>
       <p:sp>
         <p:nvSpPr>
-          <p:cNvPr id="18" name="TextBox 17"/>
+          <p:cNvPr id="31" name="TextBox 30"/>
           <p:cNvSpPr txBox="1"/>
           <p:nvPr/>
         </p:nvSpPr>
@@ -9323,7 +10821,7 @@
                 </a:solidFill>
                 <a:latin typeface="Calibri"/>
               </a:rPr>
-              <a:t>•  /generate returns 202 — never blocks</a:t>
+              <a:t>•  long/bursty jobs → ?async=true (off-path)</a:t>
             </a:r>
           </a:p>
           <a:p>
@@ -9718,23 +11216,7 @@
                 </a:solidFill>
                 <a:latin typeface="Consolas"/>
               </a:rPr>
-              <a:t>    → 202  {"job_id":"…"}</a:t>
-            </a:r>
-          </a:p>
-          <a:p>
-            <a:pPr algn="l">
-              <a:lnSpc>
-                <a:spcPct val="125000"/>
-              </a:lnSpc>
-            </a:pPr>
-            <a:r>
-              <a:rPr sz="1100" b="0">
-                <a:solidFill>
-                  <a:srgbClr val="9FE8DF"/>
-                </a:solidFill>
-                <a:latin typeface="Consolas"/>
-              </a:rPr>
-              <a:t>$ curl $URL/generate/demo/&lt;job_id&gt;   → { status: done, result: {…} }</a:t>
+              <a:t>    → 200  { template_id, blocks:[…], confidence, meta:{…} }</a:t>
             </a:r>
           </a:p>
         </p:txBody>

--- a/Case2_GenAI_Collateral.pptx
+++ b/Case2_GenAI_Collateral.pptx
@@ -7984,7 +7984,7 @@
                 </a:solidFill>
                 <a:latin typeface="Calibri"/>
               </a:rPr>
-              <a:t>Document AI + Gemini 2.5 Flash</a:t>
+              <a:t>PyMuPDF + Gemini 2.5 Flash</a:t>
             </a:r>
           </a:p>
         </p:txBody>
@@ -8879,7 +8879,7 @@
                 </a:solidFill>
                 <a:latin typeface="Consolas"/>
               </a:rPr>
-              <a:t>Google ID-token auth + IAM   ·   Model Armor   ·   per-tenant CMEK   ·   EU residency   ·   Pub/Sub DLQ   ·   Terraform (infra/)</a:t>
+              <a:t>Google ID-token auth + IAM   ·   CMEK   ·   EU-region storage   ·   Pub/Sub DLQ   ·   Terraform (infra/)</a:t>
             </a:r>
           </a:p>
         </p:txBody>
@@ -9475,60 +9475,7 @@
       </p:sp>
       <p:sp>
         <p:nvSpPr>
-          <p:cNvPr id="12" name="Rounded Rectangle 11"/>
-          <p:cNvSpPr/>
-          <p:nvPr/>
-        </p:nvSpPr>
-        <p:spPr>
-          <a:xfrm>
-            <a:off x="777240" y="5029200"/>
-            <a:ext cx="4206240" cy="310896"/>
-          </a:xfrm>
-          <a:prstGeom prst="roundRect">
-            <a:avLst/>
-          </a:prstGeom>
-          <a:noFill/>
-          <a:ln w="12700">
-            <a:solidFill>
-              <a:srgbClr val="0FB5A6"/>
-            </a:solidFill>
-          </a:ln>
-          <a:effectLst/>
-        </p:spPr>
-        <p:style>
-          <a:lnRef idx="1">
-            <a:schemeClr val="accent1"/>
-          </a:lnRef>
-          <a:fillRef idx="3">
-            <a:schemeClr val="accent1"/>
-          </a:fillRef>
-          <a:effectRef idx="2">
-            <a:schemeClr val="accent1"/>
-          </a:effectRef>
-          <a:fontRef idx="minor">
-            <a:schemeClr val="lt1"/>
-          </a:fontRef>
-        </p:style>
-        <p:txBody>
-          <a:bodyPr rtlCol="0" anchor="ctr" tIns="0" bIns="0"/>
-          <a:lstStyle/>
-          <a:p>
-            <a:pPr algn="ctr"/>
-            <a:r>
-              <a:rPr sz="1050">
-                <a:solidFill>
-                  <a:srgbClr val="0FB5A6"/>
-                </a:solidFill>
-                <a:latin typeface="Consolas"/>
-              </a:rPr>
-              <a:t>live run: 100% grounded · 5/5 within limits</a:t>
-            </a:r>
-          </a:p>
-        </p:txBody>
-      </p:sp>
-      <p:sp>
-        <p:nvSpPr>
-          <p:cNvPr id="13" name="TextBox 12"/>
+          <p:cNvPr id="12" name="TextBox 11"/>
           <p:cNvSpPr txBox="1"/>
           <p:nvPr/>
         </p:nvSpPr>
@@ -9563,7 +9510,7 @@
       </p:sp>
       <p:sp>
         <p:nvSpPr>
-          <p:cNvPr id="14" name="TextBox 13"/>
+          <p:cNvPr id="13" name="TextBox 12"/>
           <p:cNvSpPr txBox="1"/>
           <p:nvPr/>
         </p:nvSpPr>
@@ -10628,7 +10575,7 @@
                 </a:solidFill>
                 <a:latin typeface="Calibri"/>
               </a:rPr>
-              <a:t>•  PDFs are untrusted DATA — injection guard + Model Armor</a:t>
+              <a:t>•  PDFs are untrusted input — used as grounding data, not instructions</a:t>
             </a:r>
           </a:p>
           <a:p>
@@ -10644,7 +10591,7 @@
                 </a:solidFill>
                 <a:latin typeface="Calibri"/>
               </a:rPr>
-              <a:t>•  per-tenant CMEK · EU residency · VPC-SC · Secret Manager</a:t>
+              <a:t>•  CMEK-encrypted storage · EU region (europe-west1) · least-privilege IAM</a:t>
             </a:r>
           </a:p>
           <a:p>
@@ -11357,141 +11304,7 @@
       </p:sp>
       <p:sp>
         <p:nvSpPr>
-          <p:cNvPr id="9" name="Rounded Rectangle 8"/>
-          <p:cNvSpPr/>
-          <p:nvPr/>
-        </p:nvSpPr>
-        <p:spPr>
-          <a:xfrm>
-            <a:off x="7635240" y="3465575"/>
-            <a:ext cx="3794760" cy="658368"/>
-          </a:xfrm>
-          <a:prstGeom prst="roundRect">
-            <a:avLst/>
-          </a:prstGeom>
-          <a:solidFill>
-            <a:srgbClr val="1B2230"/>
-          </a:solidFill>
-          <a:ln w="12700">
-            <a:solidFill>
-              <a:srgbClr val="2C3647"/>
-            </a:solidFill>
-          </a:ln>
-          <a:effectLst/>
-        </p:spPr>
-        <p:style>
-          <a:lnRef idx="1">
-            <a:schemeClr val="accent1"/>
-          </a:lnRef>
-          <a:fillRef idx="3">
-            <a:schemeClr val="accent1"/>
-          </a:fillRef>
-          <a:effectRef idx="2">
-            <a:schemeClr val="accent1"/>
-          </a:effectRef>
-          <a:fontRef idx="minor">
-            <a:schemeClr val="lt1"/>
-          </a:fontRef>
-        </p:style>
-        <p:txBody>
-          <a:bodyPr rtlCol="0" anchor="ctr" wrap="square" lIns="73152" rIns="73152" tIns="36576" bIns="36576"/>
-          <a:lstStyle/>
-          <a:p>
-            <a:pPr algn="ctr"/>
-            <a:r>
-              <a:rPr sz="1500" b="1">
-                <a:solidFill>
-                  <a:srgbClr val="0FB5A6"/>
-                </a:solidFill>
-                <a:latin typeface="Calibri"/>
-              </a:rPr>
-              <a:t>100%</a:t>
-            </a:r>
-          </a:p>
-          <a:p>
-            <a:pPr algn="ctr"/>
-            <a:r>
-              <a:rPr sz="1150">
-                <a:solidFill>
-                  <a:srgbClr val="C7D0DE"/>
-                </a:solidFill>
-                <a:latin typeface="Calibri"/>
-              </a:rPr>
-              <a:t>grounded</a:t>
-            </a:r>
-          </a:p>
-        </p:txBody>
-      </p:sp>
-      <p:sp>
-        <p:nvSpPr>
-          <p:cNvPr id="10" name="Rounded Rectangle 9"/>
-          <p:cNvSpPr/>
-          <p:nvPr/>
-        </p:nvSpPr>
-        <p:spPr>
-          <a:xfrm>
-            <a:off x="7635240" y="4215383"/>
-            <a:ext cx="3794760" cy="658368"/>
-          </a:xfrm>
-          <a:prstGeom prst="roundRect">
-            <a:avLst/>
-          </a:prstGeom>
-          <a:solidFill>
-            <a:srgbClr val="1B2230"/>
-          </a:solidFill>
-          <a:ln w="12700">
-            <a:solidFill>
-              <a:srgbClr val="2C3647"/>
-            </a:solidFill>
-          </a:ln>
-          <a:effectLst/>
-        </p:spPr>
-        <p:style>
-          <a:lnRef idx="1">
-            <a:schemeClr val="accent1"/>
-          </a:lnRef>
-          <a:fillRef idx="3">
-            <a:schemeClr val="accent1"/>
-          </a:fillRef>
-          <a:effectRef idx="2">
-            <a:schemeClr val="accent1"/>
-          </a:effectRef>
-          <a:fontRef idx="minor">
-            <a:schemeClr val="lt1"/>
-          </a:fontRef>
-        </p:style>
-        <p:txBody>
-          <a:bodyPr rtlCol="0" anchor="ctr" wrap="square" lIns="73152" rIns="73152" tIns="36576" bIns="36576"/>
-          <a:lstStyle/>
-          <a:p>
-            <a:pPr algn="ctr"/>
-            <a:r>
-              <a:rPr sz="1500" b="1">
-                <a:solidFill>
-                  <a:srgbClr val="0FB5A6"/>
-                </a:solidFill>
-                <a:latin typeface="Calibri"/>
-              </a:rPr>
-              <a:t>5 / 5</a:t>
-            </a:r>
-          </a:p>
-          <a:p>
-            <a:pPr algn="ctr"/>
-            <a:r>
-              <a:rPr sz="1150">
-                <a:solidFill>
-                  <a:srgbClr val="C7D0DE"/>
-                </a:solidFill>
-                <a:latin typeface="Calibri"/>
-              </a:rPr>
-              <a:t>within limits</a:t>
-            </a:r>
-          </a:p>
-        </p:txBody>
-      </p:sp>
-      <p:sp>
-        <p:nvSpPr>
-          <p:cNvPr id="11" name="TextBox 10"/>
+          <p:cNvPr id="9" name="TextBox 8"/>
           <p:cNvSpPr txBox="1"/>
           <p:nvPr/>
         </p:nvSpPr>
@@ -11546,7 +11359,7 @@
       </p:sp>
       <p:sp>
         <p:nvSpPr>
-          <p:cNvPr id="12" name="TextBox 11"/>
+          <p:cNvPr id="10" name="TextBox 9"/>
           <p:cNvSpPr txBox="1"/>
           <p:nvPr/>
         </p:nvSpPr>
@@ -11581,7 +11394,7 @@
       </p:sp>
       <p:sp>
         <p:nvSpPr>
-          <p:cNvPr id="13" name="TextBox 12"/>
+          <p:cNvPr id="11" name="TextBox 10"/>
           <p:cNvSpPr txBox="1"/>
           <p:nvPr/>
         </p:nvSpPr>

--- a/Case2_GenAI_Collateral.pptx
+++ b/Case2_GenAI_Collateral.pptx
@@ -5709,7 +5709,7 @@
                 </a:solidFill>
                 <a:latin typeface="Consolas"/>
               </a:rPr>
-              <a:t>THE SOLUTION · THE API IS THE PRODUCT</a:t>
+              <a:t>THE SOLUTION · END-TO-END FLOW</a:t>
             </a:r>
           </a:p>
         </p:txBody>
@@ -5755,49 +5755,14 @@
       </p:sp>
       <p:sp>
         <p:nvSpPr>
-          <p:cNvPr id="4" name="TextBox 3"/>
-          <p:cNvSpPr txBox="1"/>
-          <p:nvPr/>
-        </p:nvSpPr>
-        <p:spPr>
-          <a:xfrm>
-            <a:off x="777240" y="1874519"/>
-            <a:ext cx="5486400" cy="274320"/>
-          </a:xfrm>
-          <a:prstGeom prst="rect">
-            <a:avLst/>
-          </a:prstGeom>
-          <a:noFill/>
-        </p:spPr>
-        <p:txBody>
-          <a:bodyPr wrap="square" anchor="t" lIns="0" rIns="0" tIns="0" bIns="0">
-            <a:spAutoFit/>
-          </a:bodyPr>
-          <a:lstStyle/>
-          <a:p>
-            <a:pPr algn="l"/>
-            <a:r>
-              <a:rPr sz="1100" b="1">
-                <a:solidFill>
-                  <a:srgbClr val="0FB5A6"/>
-                </a:solidFill>
-                <a:latin typeface="Consolas"/>
-              </a:rPr>
-              <a:t>POST /companies/{pair}/documents</a:t>
-            </a:r>
-          </a:p>
-        </p:txBody>
-      </p:sp>
-      <p:sp>
-        <p:nvSpPr>
-          <p:cNvPr id="5" name="Rounded Rectangle 4"/>
+          <p:cNvPr id="4" name="Rounded Rectangle 3"/>
           <p:cNvSpPr/>
           <p:nvPr/>
         </p:nvSpPr>
         <p:spPr>
           <a:xfrm>
-            <a:off x="777240" y="2194560"/>
-            <a:ext cx="2432304" cy="1005840"/>
+            <a:off x="777240" y="2788920"/>
+            <a:ext cx="1572768" cy="1097280"/>
           </a:xfrm>
           <a:prstGeom prst="roundRect">
             <a:avLst/>
@@ -5838,7 +5803,7 @@
                 </a:solidFill>
                 <a:latin typeface="Calibri"/>
               </a:rPr>
-              <a:t>Upload PDFs</a:t>
+              <a:t>Two PDFs</a:t>
             </a:r>
           </a:p>
           <a:p>
@@ -5857,19 +5822,19 @@
       </p:sp>
       <p:cxnSp>
         <p:nvCxnSpPr>
-          <p:cNvPr id="6" name="Connector 5"/>
+          <p:cNvPr id="5" name="Connector 4"/>
           <p:cNvCxnSpPr/>
           <p:nvPr/>
         </p:nvCxnSpPr>
         <p:spPr>
           <a:xfrm>
-            <a:off x="3227832" y="2697480"/>
-            <a:ext cx="237744" cy="0"/>
+            <a:off x="2359151" y="3337560"/>
+            <a:ext cx="219457" cy="0"/>
           </a:xfrm>
           <a:prstGeom prst="line">
             <a:avLst/>
           </a:prstGeom>
-          <a:ln w="17780">
+          <a:ln w="20320">
             <a:solidFill>
               <a:srgbClr val="475569"/>
             </a:solidFill>
@@ -5893,14 +5858,117 @@
       </p:cxnSp>
       <p:sp>
         <p:nvSpPr>
-          <p:cNvPr id="7" name="Rounded Rectangle 6"/>
+          <p:cNvPr id="6" name="Rounded Rectangle 5"/>
           <p:cNvSpPr/>
           <p:nvPr/>
         </p:nvSpPr>
         <p:spPr>
           <a:xfrm>
-            <a:off x="3483864" y="2194560"/>
-            <a:ext cx="2432304" cy="1005840"/>
+            <a:off x="2587752" y="2788920"/>
+            <a:ext cx="1572768" cy="1097280"/>
+          </a:xfrm>
+          <a:prstGeom prst="roundRect">
+            <a:avLst/>
+          </a:prstGeom>
+          <a:solidFill>
+            <a:srgbClr val="F4F6F9"/>
+          </a:solidFill>
+          <a:ln w="12700">
+            <a:solidFill>
+              <a:srgbClr val="0FB5A6"/>
+            </a:solidFill>
+          </a:ln>
+          <a:effectLst/>
+        </p:spPr>
+        <p:style>
+          <a:lnRef idx="1">
+            <a:schemeClr val="accent1"/>
+          </a:lnRef>
+          <a:fillRef idx="3">
+            <a:schemeClr val="accent1"/>
+          </a:fillRef>
+          <a:effectRef idx="2">
+            <a:schemeClr val="accent1"/>
+          </a:effectRef>
+          <a:fontRef idx="minor">
+            <a:schemeClr val="lt1"/>
+          </a:fontRef>
+        </p:style>
+        <p:txBody>
+          <a:bodyPr rtlCol="0" anchor="ctr" wrap="square" lIns="73152" rIns="73152" tIns="36576" bIns="36576"/>
+          <a:lstStyle/>
+          <a:p>
+            <a:pPr algn="ctr"/>
+            <a:r>
+              <a:rPr sz="1200" b="1">
+                <a:solidFill>
+                  <a:srgbClr val="10151E"/>
+                </a:solidFill>
+                <a:latin typeface="Calibri"/>
+              </a:rPr>
+              <a:t>Parse</a:t>
+            </a:r>
+          </a:p>
+          <a:p>
+            <a:pPr algn="ctr"/>
+            <a:r>
+              <a:rPr sz="850">
+                <a:solidFill>
+                  <a:srgbClr val="64748B"/>
+                </a:solidFill>
+                <a:latin typeface="Calibri"/>
+              </a:rPr>
+              <a:t>PyMuPDF + Gemini</a:t>
+            </a:r>
+          </a:p>
+        </p:txBody>
+      </p:sp>
+      <p:cxnSp>
+        <p:nvCxnSpPr>
+          <p:cNvPr id="7" name="Connector 6"/>
+          <p:cNvCxnSpPr/>
+          <p:nvPr/>
+        </p:nvCxnSpPr>
+        <p:spPr>
+          <a:xfrm>
+            <a:off x="4169663" y="3337560"/>
+            <a:ext cx="219457" cy="0"/>
+          </a:xfrm>
+          <a:prstGeom prst="line">
+            <a:avLst/>
+          </a:prstGeom>
+          <a:ln w="20320">
+            <a:solidFill>
+              <a:srgbClr val="475569"/>
+            </a:solidFill>
+            <a:tailEnd type="triangle" w="med" len="med"/>
+          </a:ln>
+        </p:spPr>
+        <p:style>
+          <a:lnRef idx="2">
+            <a:schemeClr val="accent1"/>
+          </a:lnRef>
+          <a:fillRef idx="0">
+            <a:schemeClr val="accent1"/>
+          </a:fillRef>
+          <a:effectRef idx="1">
+            <a:schemeClr val="accent1"/>
+          </a:effectRef>
+          <a:fontRef idx="minor">
+            <a:schemeClr val="tx1"/>
+          </a:fontRef>
+        </p:style>
+      </p:cxnSp>
+      <p:sp>
+        <p:nvSpPr>
+          <p:cNvPr id="8" name="Rounded Rectangle 7"/>
+          <p:cNvSpPr/>
+          <p:nvPr/>
+        </p:nvSpPr>
+        <p:spPr>
+          <a:xfrm>
+            <a:off x="4398264" y="2788920"/>
+            <a:ext cx="1572768" cy="1097280"/>
           </a:xfrm>
           <a:prstGeom prst="roundRect">
             <a:avLst/>
@@ -5941,7 +6009,7 @@
                 </a:solidFill>
                 <a:latin typeface="Calibri"/>
               </a:rPr>
-              <a:t>Parse (async)</a:t>
+              <a:t>Briefs</a:t>
             </a:r>
           </a:p>
           <a:p>
@@ -5953,26 +6021,26 @@
                 </a:solidFill>
                 <a:latin typeface="Calibri"/>
               </a:rPr>
-              <a:t>Pub/Sub → worker</a:t>
+              <a:t>cited facts</a:t>
             </a:r>
           </a:p>
         </p:txBody>
       </p:sp>
       <p:cxnSp>
         <p:nvCxnSpPr>
-          <p:cNvPr id="8" name="Connector 7"/>
+          <p:cNvPr id="9" name="Connector 8"/>
           <p:cNvCxnSpPr/>
           <p:nvPr/>
         </p:nvCxnSpPr>
         <p:spPr>
           <a:xfrm>
-            <a:off x="5934456" y="2697480"/>
-            <a:ext cx="237744" cy="0"/>
+            <a:off x="5980176" y="3337560"/>
+            <a:ext cx="219456" cy="0"/>
           </a:xfrm>
           <a:prstGeom prst="line">
             <a:avLst/>
           </a:prstGeom>
-          <a:ln w="17780">
+          <a:ln w="20320">
             <a:solidFill>
               <a:srgbClr val="475569"/>
             </a:solidFill>
@@ -5996,14 +6064,117 @@
       </p:cxnSp>
       <p:sp>
         <p:nvSpPr>
-          <p:cNvPr id="9" name="Rounded Rectangle 8"/>
+          <p:cNvPr id="10" name="Rounded Rectangle 9"/>
           <p:cNvSpPr/>
           <p:nvPr/>
         </p:nvSpPr>
         <p:spPr>
           <a:xfrm>
-            <a:off x="6190488" y="2194560"/>
-            <a:ext cx="2432304" cy="1005840"/>
+            <a:off x="6208776" y="2788920"/>
+            <a:ext cx="1572768" cy="1097280"/>
+          </a:xfrm>
+          <a:prstGeom prst="roundRect">
+            <a:avLst/>
+          </a:prstGeom>
+          <a:solidFill>
+            <a:srgbClr val="F4F6F9"/>
+          </a:solidFill>
+          <a:ln w="12700">
+            <a:solidFill>
+              <a:srgbClr val="0FB5A6"/>
+            </a:solidFill>
+          </a:ln>
+          <a:effectLst/>
+        </p:spPr>
+        <p:style>
+          <a:lnRef idx="1">
+            <a:schemeClr val="accent1"/>
+          </a:lnRef>
+          <a:fillRef idx="3">
+            <a:schemeClr val="accent1"/>
+          </a:fillRef>
+          <a:effectRef idx="2">
+            <a:schemeClr val="accent1"/>
+          </a:effectRef>
+          <a:fontRef idx="minor">
+            <a:schemeClr val="lt1"/>
+          </a:fontRef>
+        </p:style>
+        <p:txBody>
+          <a:bodyPr rtlCol="0" anchor="ctr" wrap="square" lIns="73152" rIns="73152" tIns="36576" bIns="36576"/>
+          <a:lstStyle/>
+          <a:p>
+            <a:pPr algn="ctr"/>
+            <a:r>
+              <a:rPr sz="1200" b="1">
+                <a:solidFill>
+                  <a:srgbClr val="10151E"/>
+                </a:solidFill>
+                <a:latin typeface="Calibri"/>
+              </a:rPr>
+              <a:t>Generate</a:t>
+            </a:r>
+          </a:p>
+          <a:p>
+            <a:pPr algn="ctr"/>
+            <a:r>
+              <a:rPr sz="850">
+                <a:solidFill>
+                  <a:srgbClr val="64748B"/>
+                </a:solidFill>
+                <a:latin typeface="Calibri"/>
+              </a:rPr>
+              <a:t>draft → verify</a:t>
+            </a:r>
+          </a:p>
+        </p:txBody>
+      </p:sp>
+      <p:cxnSp>
+        <p:nvCxnSpPr>
+          <p:cNvPr id="11" name="Connector 10"/>
+          <p:cNvCxnSpPr/>
+          <p:nvPr/>
+        </p:nvCxnSpPr>
+        <p:spPr>
+          <a:xfrm>
+            <a:off x="7790688" y="3337560"/>
+            <a:ext cx="219456" cy="0"/>
+          </a:xfrm>
+          <a:prstGeom prst="line">
+            <a:avLst/>
+          </a:prstGeom>
+          <a:ln w="20320">
+            <a:solidFill>
+              <a:srgbClr val="475569"/>
+            </a:solidFill>
+            <a:tailEnd type="triangle" w="med" len="med"/>
+          </a:ln>
+        </p:spPr>
+        <p:style>
+          <a:lnRef idx="2">
+            <a:schemeClr val="accent1"/>
+          </a:lnRef>
+          <a:fillRef idx="0">
+            <a:schemeClr val="accent1"/>
+          </a:fillRef>
+          <a:effectRef idx="1">
+            <a:schemeClr val="accent1"/>
+          </a:effectRef>
+          <a:fontRef idx="minor">
+            <a:schemeClr val="tx1"/>
+          </a:fontRef>
+        </p:style>
+      </p:cxnSp>
+      <p:sp>
+        <p:nvSpPr>
+          <p:cNvPr id="12" name="Rounded Rectangle 11"/>
+          <p:cNvSpPr/>
+          <p:nvPr/>
+        </p:nvSpPr>
+        <p:spPr>
+          <a:xfrm>
+            <a:off x="8019288" y="2788920"/>
+            <a:ext cx="1572768" cy="1097280"/>
           </a:xfrm>
           <a:prstGeom prst="roundRect">
             <a:avLst/>
@@ -6044,7 +6215,7 @@
                 </a:solidFill>
                 <a:latin typeface="Calibri"/>
               </a:rPr>
-              <a:t>CompanyBrief</a:t>
+              <a:t>ArticleJSON</a:t>
             </a:r>
           </a:p>
           <a:p>
@@ -6056,26 +6227,26 @@
                 </a:solidFill>
                 <a:latin typeface="Calibri"/>
               </a:rPr>
-              <a:t>source-tagged facts</a:t>
+              <a:t>layout-valid</a:t>
             </a:r>
           </a:p>
         </p:txBody>
       </p:sp>
       <p:cxnSp>
         <p:nvCxnSpPr>
-          <p:cNvPr id="10" name="Connector 9"/>
+          <p:cNvPr id="13" name="Connector 12"/>
           <p:cNvCxnSpPr/>
           <p:nvPr/>
         </p:nvCxnSpPr>
         <p:spPr>
           <a:xfrm>
-            <a:off x="8641080" y="2697480"/>
-            <a:ext cx="237744" cy="0"/>
+            <a:off x="9601200" y="3337560"/>
+            <a:ext cx="219456" cy="0"/>
           </a:xfrm>
           <a:prstGeom prst="line">
             <a:avLst/>
           </a:prstGeom>
-          <a:ln w="17780">
+          <a:ln w="20320">
             <a:solidFill>
               <a:srgbClr val="475569"/>
             </a:solidFill>
@@ -6099,14 +6270,14 @@
       </p:cxnSp>
       <p:sp>
         <p:nvSpPr>
-          <p:cNvPr id="11" name="Rounded Rectangle 10"/>
+          <p:cNvPr id="14" name="Rounded Rectangle 13"/>
           <p:cNvSpPr/>
           <p:nvPr/>
         </p:nvSpPr>
         <p:spPr>
           <a:xfrm>
-            <a:off x="8897112" y="2194560"/>
-            <a:ext cx="2432304" cy="1005840"/>
+            <a:off x="9829800" y="2788920"/>
+            <a:ext cx="1572768" cy="1097280"/>
           </a:xfrm>
           <a:prstGeom prst="roundRect">
             <a:avLst/>
@@ -6147,7 +6318,7 @@
                 </a:solidFill>
                 <a:latin typeface="Calibri"/>
               </a:rPr>
-              <a:t>Store</a:t>
+              <a:t>Brochure</a:t>
             </a:r>
           </a:p>
           <a:p>
@@ -6159,21 +6330,21 @@
                 </a:solidFill>
                 <a:latin typeface="Calibri"/>
               </a:rPr>
-              <a:t>Firestore + GCS</a:t>
-            </a:r>
-          </a:p>
-        </p:txBody>
-      </p:sp>
-      <p:sp>
-        <p:nvSpPr>
-          <p:cNvPr id="12" name="TextBox 11"/>
+              <a:t>render + review</a:t>
+            </a:r>
+          </a:p>
+        </p:txBody>
+      </p:sp>
+      <p:sp>
+        <p:nvSpPr>
+          <p:cNvPr id="15" name="TextBox 14"/>
           <p:cNvSpPr txBox="1"/>
           <p:nvPr/>
         </p:nvSpPr>
         <p:spPr>
           <a:xfrm>
-            <a:off x="777240" y="3611880"/>
-            <a:ext cx="6400800" cy="274320"/>
+            <a:off x="2221992" y="2368296"/>
+            <a:ext cx="2304288" cy="274320"/>
           </a:xfrm>
           <a:prstGeom prst="rect">
             <a:avLst/>
@@ -6186,404 +6357,102 @@
           </a:bodyPr>
           <a:lstStyle/>
           <a:p>
-            <a:pPr algn="l"/>
-            <a:r>
-              <a:rPr sz="1100" b="1">
+            <a:pPr algn="ctr"/>
+            <a:r>
+              <a:rPr sz="1000" b="1">
                 <a:solidFill>
                   <a:srgbClr val="0FB5A6"/>
                 </a:solidFill>
                 <a:latin typeface="Consolas"/>
               </a:rPr>
-              <a:t>POST /generate  →  200  ArticleJSON (sync)</a:t>
-            </a:r>
-          </a:p>
-        </p:txBody>
-      </p:sp>
-      <p:sp>
-        <p:nvSpPr>
-          <p:cNvPr id="13" name="Rounded Rectangle 12"/>
+              <a:t>POST /…/documents</a:t>
+            </a:r>
+          </a:p>
+        </p:txBody>
+      </p:sp>
+      <p:sp>
+        <p:nvSpPr>
+          <p:cNvPr id="16" name="TextBox 15"/>
+          <p:cNvSpPr txBox="1"/>
+          <p:nvPr/>
+        </p:nvSpPr>
+        <p:spPr>
+          <a:xfrm>
+            <a:off x="5751576" y="2368296"/>
+            <a:ext cx="2487168" cy="274320"/>
+          </a:xfrm>
+          <a:prstGeom prst="rect">
+            <a:avLst/>
+          </a:prstGeom>
+          <a:noFill/>
+        </p:spPr>
+        <p:txBody>
+          <a:bodyPr wrap="square" anchor="t" lIns="0" rIns="0" tIns="0" bIns="0">
+            <a:spAutoFit/>
+          </a:bodyPr>
+          <a:lstStyle/>
+          <a:p>
+            <a:pPr algn="ctr"/>
+            <a:r>
+              <a:rPr sz="1000" b="1">
+                <a:solidFill>
+                  <a:srgbClr val="0FB5A6"/>
+                </a:solidFill>
+                <a:latin typeface="Consolas"/>
+              </a:rPr>
+              <a:t>POST /generate → 200</a:t>
+            </a:r>
+          </a:p>
+        </p:txBody>
+      </p:sp>
+      <p:sp>
+        <p:nvSpPr>
+          <p:cNvPr id="17" name="TextBox 16"/>
+          <p:cNvSpPr txBox="1"/>
+          <p:nvPr/>
+        </p:nvSpPr>
+        <p:spPr>
+          <a:xfrm>
+            <a:off x="777240" y="4160520"/>
+            <a:ext cx="10607040" cy="548640"/>
+          </a:xfrm>
+          <a:prstGeom prst="rect">
+            <a:avLst/>
+          </a:prstGeom>
+          <a:noFill/>
+        </p:spPr>
+        <p:txBody>
+          <a:bodyPr wrap="square" anchor="t" lIns="0" rIns="0" tIns="0" bIns="0">
+            <a:spAutoFit/>
+          </a:bodyPr>
+          <a:lstStyle/>
+          <a:p>
+            <a:pPr algn="l">
+              <a:lnSpc>
+                <a:spcPct val="115000"/>
+              </a:lnSpc>
+            </a:pPr>
+            <a:r>
+              <a:rPr sz="1400" b="0">
+                <a:solidFill>
+                  <a:srgbClr val="475569"/>
+                </a:solidFill>
+                <a:latin typeface="Calibri"/>
+              </a:rPr>
+              <a:t>One continuous pipeline — input PDFs → grounded, cited ArticleJSON → rendered brochure. Deterministic, typed, fully traceable.</a:t>
+            </a:r>
+          </a:p>
+        </p:txBody>
+      </p:sp>
+      <p:sp>
+        <p:nvSpPr>
+          <p:cNvPr id="18" name="Rounded Rectangle 17"/>
           <p:cNvSpPr/>
           <p:nvPr/>
         </p:nvSpPr>
         <p:spPr>
           <a:xfrm>
-            <a:off x="777240" y="3931920"/>
-            <a:ext cx="2432304" cy="1005840"/>
-          </a:xfrm>
-          <a:prstGeom prst="roundRect">
-            <a:avLst/>
-          </a:prstGeom>
-          <a:solidFill>
-            <a:srgbClr val="F4F6F9"/>
-          </a:solidFill>
-          <a:ln w="12700">
-            <a:solidFill>
-              <a:srgbClr val="D7DEEA"/>
-            </a:solidFill>
-          </a:ln>
-          <a:effectLst/>
-        </p:spPr>
-        <p:style>
-          <a:lnRef idx="1">
-            <a:schemeClr val="accent1"/>
-          </a:lnRef>
-          <a:fillRef idx="3">
-            <a:schemeClr val="accent1"/>
-          </a:fillRef>
-          <a:effectRef idx="2">
-            <a:schemeClr val="accent1"/>
-          </a:effectRef>
-          <a:fontRef idx="minor">
-            <a:schemeClr val="lt1"/>
-          </a:fontRef>
-        </p:style>
-        <p:txBody>
-          <a:bodyPr rtlCol="0" anchor="ctr" wrap="square" lIns="73152" rIns="73152" tIns="36576" bIns="36576"/>
-          <a:lstStyle/>
-          <a:p>
-            <a:pPr algn="ctr"/>
-            <a:r>
-              <a:rPr sz="1200" b="1">
-                <a:solidFill>
-                  <a:srgbClr val="10151E"/>
-                </a:solidFill>
-                <a:latin typeface="Calibri"/>
-              </a:rPr>
-              <a:t>Assemble</a:t>
-            </a:r>
-          </a:p>
-          <a:p>
-            <a:pPr algn="ctr"/>
-            <a:r>
-              <a:rPr sz="850">
-                <a:solidFill>
-                  <a:srgbClr val="64748B"/>
-                </a:solidFill>
-                <a:latin typeface="Calibri"/>
-              </a:rPr>
-              <a:t>grounded context</a:t>
-            </a:r>
-          </a:p>
-        </p:txBody>
-      </p:sp>
-      <p:cxnSp>
-        <p:nvCxnSpPr>
-          <p:cNvPr id="14" name="Connector 13"/>
-          <p:cNvCxnSpPr/>
-          <p:nvPr/>
-        </p:nvCxnSpPr>
-        <p:spPr>
-          <a:xfrm>
-            <a:off x="3227832" y="4434840"/>
-            <a:ext cx="237744" cy="0"/>
-          </a:xfrm>
-          <a:prstGeom prst="line">
-            <a:avLst/>
-          </a:prstGeom>
-          <a:ln w="17780">
-            <a:solidFill>
-              <a:srgbClr val="475569"/>
-            </a:solidFill>
-            <a:tailEnd type="triangle" w="med" len="med"/>
-          </a:ln>
-        </p:spPr>
-        <p:style>
-          <a:lnRef idx="2">
-            <a:schemeClr val="accent1"/>
-          </a:lnRef>
-          <a:fillRef idx="0">
-            <a:schemeClr val="accent1"/>
-          </a:fillRef>
-          <a:effectRef idx="1">
-            <a:schemeClr val="accent1"/>
-          </a:effectRef>
-          <a:fontRef idx="minor">
-            <a:schemeClr val="tx1"/>
-          </a:fontRef>
-        </p:style>
-      </p:cxnSp>
-      <p:sp>
-        <p:nvSpPr>
-          <p:cNvPr id="15" name="Rounded Rectangle 14"/>
-          <p:cNvSpPr/>
-          <p:nvPr/>
-        </p:nvSpPr>
-        <p:spPr>
-          <a:xfrm>
-            <a:off x="3483864" y="3931920"/>
-            <a:ext cx="2432304" cy="1005840"/>
-          </a:xfrm>
-          <a:prstGeom prst="roundRect">
-            <a:avLst/>
-          </a:prstGeom>
-          <a:solidFill>
-            <a:srgbClr val="F4F6F9"/>
-          </a:solidFill>
-          <a:ln w="12700">
-            <a:solidFill>
-              <a:srgbClr val="D7DEEA"/>
-            </a:solidFill>
-          </a:ln>
-          <a:effectLst/>
-        </p:spPr>
-        <p:style>
-          <a:lnRef idx="1">
-            <a:schemeClr val="accent1"/>
-          </a:lnRef>
-          <a:fillRef idx="3">
-            <a:schemeClr val="accent1"/>
-          </a:fillRef>
-          <a:effectRef idx="2">
-            <a:schemeClr val="accent1"/>
-          </a:effectRef>
-          <a:fontRef idx="minor">
-            <a:schemeClr val="lt1"/>
-          </a:fontRef>
-        </p:style>
-        <p:txBody>
-          <a:bodyPr rtlCol="0" anchor="ctr" wrap="square" lIns="73152" rIns="73152" tIns="36576" bIns="36576"/>
-          <a:lstStyle/>
-          <a:p>
-            <a:pPr algn="ctr"/>
-            <a:r>
-              <a:rPr sz="1200" b="1">
-                <a:solidFill>
-                  <a:srgbClr val="10151E"/>
-                </a:solidFill>
-                <a:latin typeface="Calibri"/>
-              </a:rPr>
-              <a:t>Draft</a:t>
-            </a:r>
-          </a:p>
-          <a:p>
-            <a:pPr algn="ctr"/>
-            <a:r>
-              <a:rPr sz="850">
-                <a:solidFill>
-                  <a:srgbClr val="64748B"/>
-                </a:solidFill>
-                <a:latin typeface="Calibri"/>
-              </a:rPr>
-              <a:t>cited, Gemini Pro</a:t>
-            </a:r>
-          </a:p>
-        </p:txBody>
-      </p:sp>
-      <p:cxnSp>
-        <p:nvCxnSpPr>
-          <p:cNvPr id="16" name="Connector 15"/>
-          <p:cNvCxnSpPr/>
-          <p:nvPr/>
-        </p:nvCxnSpPr>
-        <p:spPr>
-          <a:xfrm>
-            <a:off x="5934456" y="4434840"/>
-            <a:ext cx="237744" cy="0"/>
-          </a:xfrm>
-          <a:prstGeom prst="line">
-            <a:avLst/>
-          </a:prstGeom>
-          <a:ln w="17780">
-            <a:solidFill>
-              <a:srgbClr val="475569"/>
-            </a:solidFill>
-            <a:tailEnd type="triangle" w="med" len="med"/>
-          </a:ln>
-        </p:spPr>
-        <p:style>
-          <a:lnRef idx="2">
-            <a:schemeClr val="accent1"/>
-          </a:lnRef>
-          <a:fillRef idx="0">
-            <a:schemeClr val="accent1"/>
-          </a:fillRef>
-          <a:effectRef idx="1">
-            <a:schemeClr val="accent1"/>
-          </a:effectRef>
-          <a:fontRef idx="minor">
-            <a:schemeClr val="tx1"/>
-          </a:fontRef>
-        </p:style>
-      </p:cxnSp>
-      <p:sp>
-        <p:nvSpPr>
-          <p:cNvPr id="17" name="Rounded Rectangle 16"/>
-          <p:cNvSpPr/>
-          <p:nvPr/>
-        </p:nvSpPr>
-        <p:spPr>
-          <a:xfrm>
-            <a:off x="6190488" y="3931920"/>
-            <a:ext cx="2432304" cy="1005840"/>
-          </a:xfrm>
-          <a:prstGeom prst="roundRect">
-            <a:avLst/>
-          </a:prstGeom>
-          <a:solidFill>
-            <a:srgbClr val="F4F6F9"/>
-          </a:solidFill>
-          <a:ln w="12700">
-            <a:solidFill>
-              <a:srgbClr val="D7DEEA"/>
-            </a:solidFill>
-          </a:ln>
-          <a:effectLst/>
-        </p:spPr>
-        <p:style>
-          <a:lnRef idx="1">
-            <a:schemeClr val="accent1"/>
-          </a:lnRef>
-          <a:fillRef idx="3">
-            <a:schemeClr val="accent1"/>
-          </a:fillRef>
-          <a:effectRef idx="2">
-            <a:schemeClr val="accent1"/>
-          </a:effectRef>
-          <a:fontRef idx="minor">
-            <a:schemeClr val="lt1"/>
-          </a:fontRef>
-        </p:style>
-        <p:txBody>
-          <a:bodyPr rtlCol="0" anchor="ctr" wrap="square" lIns="73152" rIns="73152" tIns="36576" bIns="36576"/>
-          <a:lstStyle/>
-          <a:p>
-            <a:pPr algn="ctr"/>
-            <a:r>
-              <a:rPr sz="1200" b="1">
-                <a:solidFill>
-                  <a:srgbClr val="10151E"/>
-                </a:solidFill>
-                <a:latin typeface="Calibri"/>
-              </a:rPr>
-              <a:t>Map + validate</a:t>
-            </a:r>
-          </a:p>
-          <a:p>
-            <a:pPr algn="ctr"/>
-            <a:r>
-              <a:rPr sz="850">
-                <a:solidFill>
-                  <a:srgbClr val="64748B"/>
-                </a:solidFill>
-                <a:latin typeface="Calibri"/>
-              </a:rPr>
-              <a:t>limits in code</a:t>
-            </a:r>
-          </a:p>
-        </p:txBody>
-      </p:sp>
-      <p:cxnSp>
-        <p:nvCxnSpPr>
-          <p:cNvPr id="18" name="Connector 17"/>
-          <p:cNvCxnSpPr/>
-          <p:nvPr/>
-        </p:nvCxnSpPr>
-        <p:spPr>
-          <a:xfrm>
-            <a:off x="8641080" y="4434840"/>
-            <a:ext cx="237744" cy="0"/>
-          </a:xfrm>
-          <a:prstGeom prst="line">
-            <a:avLst/>
-          </a:prstGeom>
-          <a:ln w="17780">
-            <a:solidFill>
-              <a:srgbClr val="475569"/>
-            </a:solidFill>
-            <a:tailEnd type="triangle" w="med" len="med"/>
-          </a:ln>
-        </p:spPr>
-        <p:style>
-          <a:lnRef idx="2">
-            <a:schemeClr val="accent1"/>
-          </a:lnRef>
-          <a:fillRef idx="0">
-            <a:schemeClr val="accent1"/>
-          </a:fillRef>
-          <a:effectRef idx="1">
-            <a:schemeClr val="accent1"/>
-          </a:effectRef>
-          <a:fontRef idx="minor">
-            <a:schemeClr val="tx1"/>
-          </a:fontRef>
-        </p:style>
-      </p:cxnSp>
-      <p:sp>
-        <p:nvSpPr>
-          <p:cNvPr id="19" name="Rounded Rectangle 18"/>
-          <p:cNvSpPr/>
-          <p:nvPr/>
-        </p:nvSpPr>
-        <p:spPr>
-          <a:xfrm>
-            <a:off x="8897112" y="3931920"/>
-            <a:ext cx="2432304" cy="1005840"/>
-          </a:xfrm>
-          <a:prstGeom prst="roundRect">
-            <a:avLst/>
-          </a:prstGeom>
-          <a:solidFill>
-            <a:srgbClr val="F4F6F9"/>
-          </a:solidFill>
-          <a:ln w="12700">
-            <a:solidFill>
-              <a:srgbClr val="D7DEEA"/>
-            </a:solidFill>
-          </a:ln>
-          <a:effectLst/>
-        </p:spPr>
-        <p:style>
-          <a:lnRef idx="1">
-            <a:schemeClr val="accent1"/>
-          </a:lnRef>
-          <a:fillRef idx="3">
-            <a:schemeClr val="accent1"/>
-          </a:fillRef>
-          <a:effectRef idx="2">
-            <a:schemeClr val="accent1"/>
-          </a:effectRef>
-          <a:fontRef idx="minor">
-            <a:schemeClr val="lt1"/>
-          </a:fontRef>
-        </p:style>
-        <p:txBody>
-          <a:bodyPr rtlCol="0" anchor="ctr" wrap="square" lIns="73152" rIns="73152" tIns="36576" bIns="36576"/>
-          <a:lstStyle/>
-          <a:p>
-            <a:pPr algn="ctr"/>
-            <a:r>
-              <a:rPr sz="1200" b="1">
-                <a:solidFill>
-                  <a:srgbClr val="10151E"/>
-                </a:solidFill>
-                <a:latin typeface="Calibri"/>
-              </a:rPr>
-              <a:t>ArticleJSON</a:t>
-            </a:r>
-          </a:p>
-          <a:p>
-            <a:pPr algn="ctr"/>
-            <a:r>
-              <a:rPr sz="850">
-                <a:solidFill>
-                  <a:srgbClr val="64748B"/>
-                </a:solidFill>
-                <a:latin typeface="Calibri"/>
-              </a:rPr>
-              <a:t>+ cost, confidence</a:t>
-            </a:r>
-          </a:p>
-        </p:txBody>
-      </p:sp>
-      <p:sp>
-        <p:nvSpPr>
-          <p:cNvPr id="20" name="Rounded Rectangle 19"/>
-          <p:cNvSpPr/>
-          <p:nvPr/>
-        </p:nvSpPr>
-        <p:spPr>
-          <a:xfrm>
-            <a:off x="777240" y="5349240"/>
+            <a:off x="777240" y="4983480"/>
             <a:ext cx="2743200" cy="310896"/>
           </a:xfrm>
           <a:prstGeom prst="roundRect">
@@ -6630,13 +6499,13 @@
       </p:sp>
       <p:sp>
         <p:nvSpPr>
-          <p:cNvPr id="21" name="Rounded Rectangle 20"/>
+          <p:cNvPr id="19" name="Rounded Rectangle 18"/>
           <p:cNvSpPr/>
           <p:nvPr/>
         </p:nvSpPr>
         <p:spPr>
           <a:xfrm>
-            <a:off x="3657600" y="5349240"/>
+            <a:off x="3657600" y="4983480"/>
             <a:ext cx="3108960" cy="310896"/>
           </a:xfrm>
           <a:prstGeom prst="roundRect">
@@ -6683,13 +6552,13 @@
       </p:sp>
       <p:sp>
         <p:nvSpPr>
-          <p:cNvPr id="22" name="Rounded Rectangle 21"/>
+          <p:cNvPr id="20" name="Rounded Rectangle 19"/>
           <p:cNvSpPr/>
           <p:nvPr/>
         </p:nvSpPr>
         <p:spPr>
           <a:xfrm>
-            <a:off x="6903720" y="5349240"/>
+            <a:off x="6903720" y="4983480"/>
             <a:ext cx="3200400" cy="310896"/>
           </a:xfrm>
           <a:prstGeom prst="roundRect">
@@ -6736,7 +6605,7 @@
       </p:sp>
       <p:sp>
         <p:nvSpPr>
-          <p:cNvPr id="23" name="TextBox 22"/>
+          <p:cNvPr id="21" name="TextBox 20"/>
           <p:cNvSpPr txBox="1"/>
           <p:nvPr/>
         </p:nvSpPr>
@@ -6771,7 +6640,7 @@
       </p:sp>
       <p:sp>
         <p:nvSpPr>
-          <p:cNvPr id="24" name="TextBox 23"/>
+          <p:cNvPr id="22" name="TextBox 21"/>
           <p:cNvSpPr txBox="1"/>
           <p:nvPr/>
         </p:nvSpPr>

--- a/Case2_GenAI_Collateral.pptx
+++ b/Case2_GenAI_Collateral.pptx
@@ -4938,7 +4938,7 @@
                 </a:solidFill>
                 <a:latin typeface="Calibri"/>
               </a:rPr>
-              <a:t>tune the faithfulness judge · golden eval set in CI</a:t>
+              <a:t>Model Armor injection filter · tune the judge · golden eval set in CI</a:t>
             </a:r>
           </a:p>
         </p:txBody>
@@ -10444,7 +10444,7 @@
                 </a:solidFill>
                 <a:latin typeface="Calibri"/>
               </a:rPr>
-              <a:t>•  PDFs are untrusted input — used as grounding data, not instructions</a:t>
+              <a:t>•  Untrusted PDFs → injection hard gate (refuse, fail closed) + data-not-instructions channel</a:t>
             </a:r>
           </a:p>
           <a:p>

--- a/Case2_GenAI_Collateral.pptx
+++ b/Case2_GenAI_Collateral.pptx
@@ -6,16 +6,16 @@
   </p:sldMasterIdLst>
   <p:sldIdLst>
     <p:sldId id="256" r:id="rId7"/>
-    <p:sldId id="257" r:id="rId8"/>
-    <p:sldId id="258" r:id="rId9"/>
-    <p:sldId id="259" r:id="rId10"/>
-    <p:sldId id="260" r:id="rId11"/>
-    <p:sldId id="261" r:id="rId12"/>
-    <p:sldId id="262" r:id="rId13"/>
-    <p:sldId id="263" r:id="rId14"/>
-    <p:sldId id="264" r:id="rId15"/>
-    <p:sldId id="265" r:id="rId16"/>
-    <p:sldId id="266" r:id="rId17"/>
+    <p:sldId id="257" r:id="rId9"/>
+    <p:sldId id="258" r:id="rId10"/>
+    <p:sldId id="259" r:id="rId11"/>
+    <p:sldId id="260" r:id="rId12"/>
+    <p:sldId id="261" r:id="rId13"/>
+    <p:sldId id="262" r:id="rId14"/>
+    <p:sldId id="263" r:id="rId15"/>
+    <p:sldId id="264" r:id="rId16"/>
+    <p:sldId id="265" r:id="rId17"/>
+    <p:sldId id="266" r:id="rId18"/>
   </p:sldIdLst>
   <p:sldSz cx="12191695" cy="6858000" type="screen4x3"/>
   <p:notesSz cx="6858000" cy="9144000"/>
@@ -115,6 +115,1209 @@
     </a:lvl9pPr>
   </p:defaultTextStyle>
 </p:presentation>
+</file>
+
+<file path=ppt/notesMasters/notesMaster1.xml><?xml version="1.0" encoding="utf-8"?>
+<p:notesMaster xmlns:a="http://schemas.openxmlformats.org/drawingml/2006/main" xmlns:p="http://schemas.openxmlformats.org/presentationml/2006/main" xmlns:r="http://schemas.openxmlformats.org/officeDocument/2006/relationships">
+  <p:cSld>
+    <p:bg>
+      <p:bgRef idx="1001">
+        <a:schemeClr val="bg1"/>
+      </p:bgRef>
+    </p:bg>
+    <p:spTree>
+      <p:nvGrpSpPr>
+        <p:cNvPr id="1" name=""/>
+        <p:cNvGrpSpPr/>
+        <p:nvPr/>
+      </p:nvGrpSpPr>
+      <p:grpSpPr>
+        <a:xfrm>
+          <a:off x="0" y="0"/>
+          <a:ext cx="0" cy="0"/>
+          <a:chOff x="0" y="0"/>
+          <a:chExt cx="0" cy="0"/>
+        </a:xfrm>
+      </p:grpSpPr>
+      <p:sp>
+        <p:nvSpPr>
+          <p:cNvPr id="2" name="Header Placeholder 1"/>
+          <p:cNvSpPr>
+            <a:spLocks noGrp="1"/>
+          </p:cNvSpPr>
+          <p:nvPr>
+            <p:ph type="hdr" sz="quarter"/>
+          </p:nvPr>
+        </p:nvSpPr>
+        <p:spPr>
+          <a:xfrm>
+            <a:off x="0" y="0"/>
+            <a:ext cx="2971800" cy="457200"/>
+          </a:xfrm>
+          <a:prstGeom prst="rect">
+            <a:avLst/>
+          </a:prstGeom>
+        </p:spPr>
+        <p:txBody>
+          <a:bodyPr vert="horz" lIns="91440" tIns="45720" rIns="91440" bIns="45720" rtlCol="0"/>
+          <a:lstStyle>
+            <a:lvl1pPr algn="l">
+              <a:defRPr sz="1200"/>
+            </a:lvl1pPr>
+          </a:lstStyle>
+          <a:p>
+            <a:endParaRPr lang="en-US"/>
+          </a:p>
+        </p:txBody>
+      </p:sp>
+      <p:sp>
+        <p:nvSpPr>
+          <p:cNvPr id="3" name="Date Placeholder 2"/>
+          <p:cNvSpPr>
+            <a:spLocks noGrp="1"/>
+          </p:cNvSpPr>
+          <p:nvPr>
+            <p:ph type="dt" idx="1"/>
+          </p:nvPr>
+        </p:nvSpPr>
+        <p:spPr>
+          <a:xfrm>
+            <a:off x="3884613" y="0"/>
+            <a:ext cx="2971800" cy="457200"/>
+          </a:xfrm>
+          <a:prstGeom prst="rect">
+            <a:avLst/>
+          </a:prstGeom>
+        </p:spPr>
+        <p:txBody>
+          <a:bodyPr vert="horz" lIns="91440" tIns="45720" rIns="91440" bIns="45720" rtlCol="0"/>
+          <a:lstStyle>
+            <a:lvl1pPr algn="r">
+              <a:defRPr sz="1200"/>
+            </a:lvl1pPr>
+          </a:lstStyle>
+          <a:p>
+            <a:fld id="{0F89C1C7-3DCD-1040-A9CF-14679D8B5DDD}" type="datetimeFigureOut">
+              <a:rPr lang="en-US" smtClean="0"/>
+              <a:t>10/17/16</a:t>
+            </a:fld>
+            <a:endParaRPr lang="en-US"/>
+          </a:p>
+        </p:txBody>
+      </p:sp>
+      <p:sp>
+        <p:nvSpPr>
+          <p:cNvPr id="4" name="Slide Image Placeholder 3"/>
+          <p:cNvSpPr>
+            <a:spLocks noGrp="1" noRot="1" noChangeAspect="1"/>
+          </p:cNvSpPr>
+          <p:nvPr>
+            <p:ph type="sldImg" idx="2"/>
+          </p:nvPr>
+        </p:nvSpPr>
+        <p:spPr>
+          <a:xfrm>
+            <a:off x="1143000" y="685800"/>
+            <a:ext cx="4572000" cy="3429000"/>
+          </a:xfrm>
+          <a:prstGeom prst="rect">
+            <a:avLst/>
+          </a:prstGeom>
+          <a:noFill/>
+          <a:ln w="12700">
+            <a:solidFill>
+              <a:prstClr val="black"/>
+            </a:solidFill>
+          </a:ln>
+        </p:spPr>
+        <p:txBody>
+          <a:bodyPr vert="horz" lIns="91440" tIns="45720" rIns="91440" bIns="45720" rtlCol="0" anchor="ctr"/>
+          <a:lstStyle/>
+          <a:p>
+            <a:endParaRPr lang="en-US"/>
+          </a:p>
+        </p:txBody>
+      </p:sp>
+      <p:sp>
+        <p:nvSpPr>
+          <p:cNvPr id="5" name="Notes Placeholder 4"/>
+          <p:cNvSpPr>
+            <a:spLocks noGrp="1"/>
+          </p:cNvSpPr>
+          <p:nvPr>
+            <p:ph type="body" sz="quarter" idx="3"/>
+          </p:nvPr>
+        </p:nvSpPr>
+        <p:spPr>
+          <a:xfrm>
+            <a:off x="685800" y="4343400"/>
+            <a:ext cx="5486400" cy="4114800"/>
+          </a:xfrm>
+          <a:prstGeom prst="rect">
+            <a:avLst/>
+          </a:prstGeom>
+        </p:spPr>
+        <p:txBody>
+          <a:bodyPr vert="horz" lIns="91440" tIns="45720" rIns="91440" bIns="45720" rtlCol="0"/>
+          <a:lstStyle/>
+          <a:p>
+            <a:pPr lvl="0"/>
+            <a:r>
+              <a:rPr lang="en-US" smtClean="0"/>
+              <a:t>Click to edit Master text styles</a:t>
+            </a:r>
+          </a:p>
+          <a:p>
+            <a:pPr lvl="1"/>
+            <a:r>
+              <a:rPr lang="en-US" smtClean="0"/>
+              <a:t>Second level</a:t>
+            </a:r>
+          </a:p>
+          <a:p>
+            <a:pPr lvl="2"/>
+            <a:r>
+              <a:rPr lang="en-US" smtClean="0"/>
+              <a:t>Third level</a:t>
+            </a:r>
+          </a:p>
+          <a:p>
+            <a:pPr lvl="3"/>
+            <a:r>
+              <a:rPr lang="en-US" smtClean="0"/>
+              <a:t>Fourth level</a:t>
+            </a:r>
+          </a:p>
+          <a:p>
+            <a:pPr lvl="4"/>
+            <a:r>
+              <a:rPr lang="en-US" smtClean="0"/>
+              <a:t>Fifth level</a:t>
+            </a:r>
+            <a:endParaRPr lang="en-US"/>
+          </a:p>
+        </p:txBody>
+      </p:sp>
+      <p:sp>
+        <p:nvSpPr>
+          <p:cNvPr id="6" name="Footer Placeholder 5"/>
+          <p:cNvSpPr>
+            <a:spLocks noGrp="1"/>
+          </p:cNvSpPr>
+          <p:nvPr>
+            <p:ph type="ftr" sz="quarter" idx="4"/>
+          </p:nvPr>
+        </p:nvSpPr>
+        <p:spPr>
+          <a:xfrm>
+            <a:off x="0" y="8685213"/>
+            <a:ext cx="2971800" cy="457200"/>
+          </a:xfrm>
+          <a:prstGeom prst="rect">
+            <a:avLst/>
+          </a:prstGeom>
+        </p:spPr>
+        <p:txBody>
+          <a:bodyPr vert="horz" lIns="91440" tIns="45720" rIns="91440" bIns="45720" rtlCol="0" anchor="b"/>
+          <a:lstStyle>
+            <a:lvl1pPr algn="l">
+              <a:defRPr sz="1200"/>
+            </a:lvl1pPr>
+          </a:lstStyle>
+          <a:p>
+            <a:endParaRPr lang="en-US"/>
+          </a:p>
+        </p:txBody>
+      </p:sp>
+      <p:sp>
+        <p:nvSpPr>
+          <p:cNvPr id="7" name="Slide Number Placeholder 6"/>
+          <p:cNvSpPr>
+            <a:spLocks noGrp="1"/>
+          </p:cNvSpPr>
+          <p:nvPr>
+            <p:ph type="sldNum" sz="quarter" idx="5"/>
+          </p:nvPr>
+        </p:nvSpPr>
+        <p:spPr>
+          <a:xfrm>
+            <a:off x="3884613" y="8685213"/>
+            <a:ext cx="2971800" cy="457200"/>
+          </a:xfrm>
+          <a:prstGeom prst="rect">
+            <a:avLst/>
+          </a:prstGeom>
+        </p:spPr>
+        <p:txBody>
+          <a:bodyPr vert="horz" lIns="91440" tIns="45720" rIns="91440" bIns="45720" rtlCol="0" anchor="b"/>
+          <a:lstStyle>
+            <a:lvl1pPr algn="r">
+              <a:defRPr sz="1200"/>
+            </a:lvl1pPr>
+          </a:lstStyle>
+          <a:p>
+            <a:fld id="{BB5E49A5-4136-284D-997B-48E1D791AD67}" type="slidenum">
+              <a:rPr lang="en-US" smtClean="0"/>
+              <a:t>‹#›</a:t>
+            </a:fld>
+            <a:endParaRPr lang="en-US"/>
+          </a:p>
+        </p:txBody>
+      </p:sp>
+    </p:spTree>
+    <p:extLst>
+      <p:ext uri="{BB962C8B-B14F-4D97-AF65-F5344CB8AC3E}">
+        <p14:creationId xmlns:p14="http://schemas.microsoft.com/office/powerpoint/2010/main" val="2623252185"/>
+      </p:ext>
+    </p:extLst>
+  </p:cSld>
+  <p:clrMap bg1="lt1" tx1="dk1" bg2="lt2" tx2="dk2" accent1="accent1" accent2="accent2" accent3="accent3" accent4="accent4" accent5="accent5" accent6="accent6" hlink="hlink" folHlink="folHlink"/>
+  <p:notesStyle>
+    <a:lvl1pPr marL="0" algn="l" defTabSz="457200" rtl="0" eaLnBrk="1" latinLnBrk="0" hangingPunct="1">
+      <a:defRPr sz="1200" kern="1200">
+        <a:solidFill>
+          <a:schemeClr val="tx1"/>
+        </a:solidFill>
+        <a:latin typeface="+mn-lt"/>
+        <a:ea typeface="+mn-ea"/>
+        <a:cs typeface="+mn-cs"/>
+      </a:defRPr>
+    </a:lvl1pPr>
+    <a:lvl2pPr marL="457200" algn="l" defTabSz="457200" rtl="0" eaLnBrk="1" latinLnBrk="0" hangingPunct="1">
+      <a:defRPr sz="1200" kern="1200">
+        <a:solidFill>
+          <a:schemeClr val="tx1"/>
+        </a:solidFill>
+        <a:latin typeface="+mn-lt"/>
+        <a:ea typeface="+mn-ea"/>
+        <a:cs typeface="+mn-cs"/>
+      </a:defRPr>
+    </a:lvl2pPr>
+    <a:lvl3pPr marL="914400" algn="l" defTabSz="457200" rtl="0" eaLnBrk="1" latinLnBrk="0" hangingPunct="1">
+      <a:defRPr sz="1200" kern="1200">
+        <a:solidFill>
+          <a:schemeClr val="tx1"/>
+        </a:solidFill>
+        <a:latin typeface="+mn-lt"/>
+        <a:ea typeface="+mn-ea"/>
+        <a:cs typeface="+mn-cs"/>
+      </a:defRPr>
+    </a:lvl3pPr>
+    <a:lvl4pPr marL="1371600" algn="l" defTabSz="457200" rtl="0" eaLnBrk="1" latinLnBrk="0" hangingPunct="1">
+      <a:defRPr sz="1200" kern="1200">
+        <a:solidFill>
+          <a:schemeClr val="tx1"/>
+        </a:solidFill>
+        <a:latin typeface="+mn-lt"/>
+        <a:ea typeface="+mn-ea"/>
+        <a:cs typeface="+mn-cs"/>
+      </a:defRPr>
+    </a:lvl4pPr>
+    <a:lvl5pPr marL="1828800" algn="l" defTabSz="457200" rtl="0" eaLnBrk="1" latinLnBrk="0" hangingPunct="1">
+      <a:defRPr sz="1200" kern="1200">
+        <a:solidFill>
+          <a:schemeClr val="tx1"/>
+        </a:solidFill>
+        <a:latin typeface="+mn-lt"/>
+        <a:ea typeface="+mn-ea"/>
+        <a:cs typeface="+mn-cs"/>
+      </a:defRPr>
+    </a:lvl5pPr>
+    <a:lvl6pPr marL="2286000" algn="l" defTabSz="457200" rtl="0" eaLnBrk="1" latinLnBrk="0" hangingPunct="1">
+      <a:defRPr sz="1200" kern="1200">
+        <a:solidFill>
+          <a:schemeClr val="tx1"/>
+        </a:solidFill>
+        <a:latin typeface="+mn-lt"/>
+        <a:ea typeface="+mn-ea"/>
+        <a:cs typeface="+mn-cs"/>
+      </a:defRPr>
+    </a:lvl6pPr>
+    <a:lvl7pPr marL="2743200" algn="l" defTabSz="457200" rtl="0" eaLnBrk="1" latinLnBrk="0" hangingPunct="1">
+      <a:defRPr sz="1200" kern="1200">
+        <a:solidFill>
+          <a:schemeClr val="tx1"/>
+        </a:solidFill>
+        <a:latin typeface="+mn-lt"/>
+        <a:ea typeface="+mn-ea"/>
+        <a:cs typeface="+mn-cs"/>
+      </a:defRPr>
+    </a:lvl7pPr>
+    <a:lvl8pPr marL="3200400" algn="l" defTabSz="457200" rtl="0" eaLnBrk="1" latinLnBrk="0" hangingPunct="1">
+      <a:defRPr sz="1200" kern="1200">
+        <a:solidFill>
+          <a:schemeClr val="tx1"/>
+        </a:solidFill>
+        <a:latin typeface="+mn-lt"/>
+        <a:ea typeface="+mn-ea"/>
+        <a:cs typeface="+mn-cs"/>
+      </a:defRPr>
+    </a:lvl8pPr>
+    <a:lvl9pPr marL="3657600" algn="l" defTabSz="457200" rtl="0" eaLnBrk="1" latinLnBrk="0" hangingPunct="1">
+      <a:defRPr sz="1200" kern="1200">
+        <a:solidFill>
+          <a:schemeClr val="tx1"/>
+        </a:solidFill>
+        <a:latin typeface="+mn-lt"/>
+        <a:ea typeface="+mn-ea"/>
+        <a:cs typeface="+mn-cs"/>
+      </a:defRPr>
+    </a:lvl9pPr>
+  </p:notesStyle>
+</p:notesMaster>
+</file>
+
+<file path=ppt/notesSlides/notesSlide1.xml><?xml version="1.0" encoding="utf-8"?>
+<p:notes xmlns:a="http://schemas.openxmlformats.org/drawingml/2006/main" xmlns:p="http://schemas.openxmlformats.org/presentationml/2006/main" xmlns:r="http://schemas.openxmlformats.org/officeDocument/2006/relationships">
+  <p:cSld>
+    <p:spTree>
+      <p:nvGrpSpPr>
+        <p:cNvPr id="1" name=""/>
+        <p:cNvGrpSpPr/>
+        <p:nvPr/>
+      </p:nvGrpSpPr>
+      <p:grpSpPr>
+        <a:xfrm>
+          <a:off x="0" y="0"/>
+          <a:ext cx="0" cy="0"/>
+          <a:chOff x="0" y="0"/>
+          <a:chExt cx="0" cy="0"/>
+        </a:xfrm>
+      </p:grpSpPr>
+      <p:sp>
+        <p:nvSpPr>
+          <p:cNvPr id="2" name="Slide Image Placeholder 1"/>
+          <p:cNvSpPr>
+            <a:spLocks noGrp="1"/>
+          </p:cNvSpPr>
+          <p:nvPr>
+            <p:ph type="sldImg" idx="2"/>
+          </p:nvPr>
+        </p:nvSpPr>
+        <p:spPr/>
+      </p:sp>
+      <p:sp>
+        <p:nvSpPr>
+          <p:cNvPr id="3" name="Notes Placeholder 2"/>
+          <p:cNvSpPr>
+            <a:spLocks noGrp="1"/>
+          </p:cNvSpPr>
+          <p:nvPr>
+            <p:ph type="body" idx="3" sz="quarter"/>
+          </p:nvPr>
+        </p:nvSpPr>
+        <p:spPr/>
+        <p:txBody>
+          <a:bodyPr/>
+          <a:lstStyle/>
+          <a:p>
+            <a:r>
+              <a:t>⏱ 0:30 · by 0:30</a:t>
+            </a:r>
+          </a:p>
+          <a:p/>
+          <a:p>
+            <a:r>
+              <a:t>Open with — 'Before I design anything, can I confirm the goal, the data, the latency class, the budget, and any privacy rules?' Then walk the 5 steps; lead with the simplest thing that works.</a:t>
+            </a:r>
+          </a:p>
+        </p:txBody>
+      </p:sp>
+      <p:sp>
+        <p:nvSpPr>
+          <p:cNvPr id="4" name="Slide Number Placeholder 3"/>
+          <p:cNvSpPr>
+            <a:spLocks noGrp="1"/>
+          </p:cNvSpPr>
+          <p:nvPr>
+            <p:ph type="sldNum" idx="5" sz="quarter"/>
+          </p:nvPr>
+        </p:nvSpPr>
+        <p:spPr/>
+      </p:sp>
+    </p:spTree>
+  </p:cSld>
+  <p:clrMapOvr>
+    <a:masterClrMapping/>
+  </p:clrMapOvr>
+</p:notes>
+</file>
+
+<file path=ppt/notesSlides/notesSlide10.xml><?xml version="1.0" encoding="utf-8"?>
+<p:notes xmlns:a="http://schemas.openxmlformats.org/drawingml/2006/main" xmlns:p="http://schemas.openxmlformats.org/presentationml/2006/main" xmlns:r="http://schemas.openxmlformats.org/officeDocument/2006/relationships">
+  <p:cSld>
+    <p:spTree>
+      <p:nvGrpSpPr>
+        <p:cNvPr id="1" name=""/>
+        <p:cNvGrpSpPr/>
+        <p:nvPr/>
+      </p:nvGrpSpPr>
+      <p:grpSpPr>
+        <a:xfrm>
+          <a:off x="0" y="0"/>
+          <a:ext cx="0" cy="0"/>
+          <a:chOff x="0" y="0"/>
+          <a:chExt cx="0" cy="0"/>
+        </a:xfrm>
+      </p:grpSpPr>
+      <p:sp>
+        <p:nvSpPr>
+          <p:cNvPr id="2" name="Slide Image Placeholder 1"/>
+          <p:cNvSpPr>
+            <a:spLocks noGrp="1"/>
+          </p:cNvSpPr>
+          <p:nvPr>
+            <p:ph type="sldImg" idx="2"/>
+          </p:nvPr>
+        </p:nvSpPr>
+        <p:spPr/>
+      </p:sp>
+      <p:sp>
+        <p:nvSpPr>
+          <p:cNvPr id="3" name="Notes Placeholder 2"/>
+          <p:cNvSpPr>
+            <a:spLocks noGrp="1"/>
+          </p:cNvSpPr>
+          <p:nvPr>
+            <p:ph type="body" idx="3" sz="quarter"/>
+          </p:nvPr>
+        </p:nvSpPr>
+        <p:spPr/>
+        <p:txBody>
+          <a:bodyPr/>
+          <a:lstStyle/>
+          <a:p>
+            <a:r>
+              <a:t>⏱ 0:45 · by 13:30</a:t>
+            </a:r>
+          </a:p>
+          <a:p/>
+          <a:p>
+            <a:r>
+              <a:t>Deterministic typed DAG, NOT an agent (fixed flow, no dynamic looping). Long-context, NOT RAG (2-company corpus fits ~1M tokens; vector DB is overkill). Managed Gemini, NOT self-host/fine-tune (ship fast, ~$0.01/unit, no GPUs). Limits + image choice in CODE, not the model. Cloud Run, NOT GKE / Agent Engine (right-sized; scale-to-zero). Agentic scale-up path = Google ADK + Vertex AI Agent Engine.</a:t>
+            </a:r>
+          </a:p>
+        </p:txBody>
+      </p:sp>
+      <p:sp>
+        <p:nvSpPr>
+          <p:cNvPr id="4" name="Slide Number Placeholder 3"/>
+          <p:cNvSpPr>
+            <a:spLocks noGrp="1"/>
+          </p:cNvSpPr>
+          <p:nvPr>
+            <p:ph type="sldNum" idx="5" sz="quarter"/>
+          </p:nvPr>
+        </p:nvSpPr>
+        <p:spPr/>
+      </p:sp>
+    </p:spTree>
+  </p:cSld>
+  <p:clrMapOvr>
+    <a:masterClrMapping/>
+  </p:clrMapOvr>
+</p:notes>
+</file>
+
+<file path=ppt/notesSlides/notesSlide11.xml><?xml version="1.0" encoding="utf-8"?>
+<p:notes xmlns:a="http://schemas.openxmlformats.org/drawingml/2006/main" xmlns:p="http://schemas.openxmlformats.org/presentationml/2006/main" xmlns:r="http://schemas.openxmlformats.org/officeDocument/2006/relationships">
+  <p:cSld>
+    <p:spTree>
+      <p:nvGrpSpPr>
+        <p:cNvPr id="1" name=""/>
+        <p:cNvGrpSpPr/>
+        <p:nvPr/>
+      </p:nvGrpSpPr>
+      <p:grpSpPr>
+        <a:xfrm>
+          <a:off x="0" y="0"/>
+          <a:ext cx="0" cy="0"/>
+          <a:chOff x="0" y="0"/>
+          <a:chExt cx="0" cy="0"/>
+        </a:xfrm>
+      </p:grpSpPr>
+      <p:sp>
+        <p:nvSpPr>
+          <p:cNvPr id="2" name="Slide Image Placeholder 1"/>
+          <p:cNvSpPr>
+            <a:spLocks noGrp="1"/>
+          </p:cNvSpPr>
+          <p:nvPr>
+            <p:ph type="sldImg" idx="2"/>
+          </p:nvPr>
+        </p:nvSpPr>
+        <p:spPr/>
+      </p:sp>
+      <p:sp>
+        <p:nvSpPr>
+          <p:cNvPr id="3" name="Notes Placeholder 2"/>
+          <p:cNvSpPr>
+            <a:spLocks noGrp="1"/>
+          </p:cNvSpPr>
+          <p:nvPr>
+            <p:ph type="body" idx="3" sz="quarter"/>
+          </p:nvPr>
+        </p:nvSpPr>
+        <p:spPr/>
+        <p:txBody>
+          <a:bodyPr/>
+          <a:lstStyle/>
+          <a:p>
+            <a:r>
+              <a:t>⏱ 0:45 · by 14:15</a:t>
+            </a:r>
+          </a:p>
+          <a:p/>
+          <a:p>
+            <a:r>
+              <a:t>Multi-tenant: derive tenant from the verified TOKEN CLAIM (today it is the X-Tenant-ID header, default 'default') + per-tenant CMEK + rate/cost budgets — a config + auth-claim change, NOT a refactor (storage already keyed tenant-first). Org dashboard: BigQuery export is built → only Looker wiring left. Go agentic → Vertex AI Agent Engine (ADK). Harden: Model Armor (injection) · EU model residency · VPC-SC · Secret Manager · Cloud DLP (PII scrub on ingestion).</a:t>
+            </a:r>
+          </a:p>
+        </p:txBody>
+      </p:sp>
+      <p:sp>
+        <p:nvSpPr>
+          <p:cNvPr id="4" name="Slide Number Placeholder 3"/>
+          <p:cNvSpPr>
+            <a:spLocks noGrp="1"/>
+          </p:cNvSpPr>
+          <p:nvPr>
+            <p:ph type="sldNum" idx="5" sz="quarter"/>
+          </p:nvPr>
+        </p:nvSpPr>
+        <p:spPr/>
+      </p:sp>
+    </p:spTree>
+  </p:cSld>
+  <p:clrMapOvr>
+    <a:masterClrMapping/>
+  </p:clrMapOvr>
+</p:notes>
+</file>
+
+<file path=ppt/notesSlides/notesSlide2.xml><?xml version="1.0" encoding="utf-8"?>
+<p:notes xmlns:a="http://schemas.openxmlformats.org/drawingml/2006/main" xmlns:p="http://schemas.openxmlformats.org/presentationml/2006/main" xmlns:r="http://schemas.openxmlformats.org/officeDocument/2006/relationships">
+  <p:cSld>
+    <p:spTree>
+      <p:nvGrpSpPr>
+        <p:cNvPr id="1" name=""/>
+        <p:cNvGrpSpPr/>
+        <p:nvPr/>
+      </p:nvGrpSpPr>
+      <p:grpSpPr>
+        <a:xfrm>
+          <a:off x="0" y="0"/>
+          <a:ext cx="0" cy="0"/>
+          <a:chOff x="0" y="0"/>
+          <a:chExt cx="0" cy="0"/>
+        </a:xfrm>
+      </p:grpSpPr>
+      <p:sp>
+        <p:nvSpPr>
+          <p:cNvPr id="2" name="Slide Image Placeholder 1"/>
+          <p:cNvSpPr>
+            <a:spLocks noGrp="1"/>
+          </p:cNvSpPr>
+          <p:nvPr>
+            <p:ph type="sldImg" idx="2"/>
+          </p:nvPr>
+        </p:nvSpPr>
+        <p:spPr/>
+      </p:sp>
+      <p:sp>
+        <p:nvSpPr>
+          <p:cNvPr id="3" name="Notes Placeholder 2"/>
+          <p:cNvSpPr>
+            <a:spLocks noGrp="1"/>
+          </p:cNvSpPr>
+          <p:nvPr>
+            <p:ph type="body" idx="3" sz="quarter"/>
+          </p:nvPr>
+        </p:nvSpPr>
+        <p:spPr/>
+        <p:txBody>
+          <a:bodyPr/>
+          <a:lstStyle/>
+          <a:p>
+            <a:r>
+              <a:t>⏱ 1:30 · by 2:00</a:t>
+            </a:r>
+          </a:p>
+          <a:p/>
+          <a:p>
+            <a:r>
+              <a:t>Problem &amp; business value — frame in the client's unit: editor time + cost per brochure, and the risk of a factual error in a B2B pitch.</a:t>
+            </a:r>
+          </a:p>
+        </p:txBody>
+      </p:sp>
+      <p:sp>
+        <p:nvSpPr>
+          <p:cNvPr id="4" name="Slide Number Placeholder 3"/>
+          <p:cNvSpPr>
+            <a:spLocks noGrp="1"/>
+          </p:cNvSpPr>
+          <p:nvPr>
+            <p:ph type="sldNum" idx="5" sz="quarter"/>
+          </p:nvPr>
+        </p:nvSpPr>
+        <p:spPr/>
+      </p:sp>
+    </p:spTree>
+  </p:cSld>
+  <p:clrMapOvr>
+    <a:masterClrMapping/>
+  </p:clrMapOvr>
+</p:notes>
+</file>
+
+<file path=ppt/notesSlides/notesSlide3.xml><?xml version="1.0" encoding="utf-8"?>
+<p:notes xmlns:a="http://schemas.openxmlformats.org/drawingml/2006/main" xmlns:p="http://schemas.openxmlformats.org/presentationml/2006/main" xmlns:r="http://schemas.openxmlformats.org/officeDocument/2006/relationships">
+  <p:cSld>
+    <p:spTree>
+      <p:nvGrpSpPr>
+        <p:cNvPr id="1" name=""/>
+        <p:cNvGrpSpPr/>
+        <p:nvPr/>
+      </p:nvGrpSpPr>
+      <p:grpSpPr>
+        <a:xfrm>
+          <a:off x="0" y="0"/>
+          <a:ext cx="0" cy="0"/>
+          <a:chOff x="0" y="0"/>
+          <a:chExt cx="0" cy="0"/>
+        </a:xfrm>
+      </p:grpSpPr>
+      <p:sp>
+        <p:nvSpPr>
+          <p:cNvPr id="2" name="Slide Image Placeholder 1"/>
+          <p:cNvSpPr>
+            <a:spLocks noGrp="1"/>
+          </p:cNvSpPr>
+          <p:nvPr>
+            <p:ph type="sldImg" idx="2"/>
+          </p:nvPr>
+        </p:nvSpPr>
+        <p:spPr/>
+      </p:sp>
+      <p:sp>
+        <p:nvSpPr>
+          <p:cNvPr id="3" name="Notes Placeholder 2"/>
+          <p:cNvSpPr>
+            <a:spLocks noGrp="1"/>
+          </p:cNvSpPr>
+          <p:nvPr>
+            <p:ph type="body" idx="3" sz="quarter"/>
+          </p:nvPr>
+        </p:nvSpPr>
+        <p:spPr/>
+        <p:txBody>
+          <a:bodyPr/>
+          <a:lstStyle/>
+          <a:p>
+            <a:r>
+              <a:t>⏱ 1:15 · by 3:15</a:t>
+            </a:r>
+          </a:p>
+          <a:p/>
+          <a:p>
+            <a:r>
+              <a:t>Endpoints (the brief): POST /companies/{pair}/documents → upload, async parse, brief · POST /generate {pair_id, prompt, template_id} → 200 ArticleJSON (synchronous). ?async=true → 202 + job_id, then poll GET /generate/{pair}/{job}. Internal pipeline: parse → ground → draft → map → validate &amp; repair → ArticleJSON.</a:t>
+            </a:r>
+          </a:p>
+        </p:txBody>
+      </p:sp>
+      <p:sp>
+        <p:nvSpPr>
+          <p:cNvPr id="4" name="Slide Number Placeholder 3"/>
+          <p:cNvSpPr>
+            <a:spLocks noGrp="1"/>
+          </p:cNvSpPr>
+          <p:nvPr>
+            <p:ph type="sldNum" idx="5" sz="quarter"/>
+          </p:nvPr>
+        </p:nvSpPr>
+        <p:spPr/>
+      </p:sp>
+    </p:spTree>
+  </p:cSld>
+  <p:clrMapOvr>
+    <a:masterClrMapping/>
+  </p:clrMapOvr>
+</p:notes>
+</file>
+
+<file path=ppt/notesSlides/notesSlide4.xml><?xml version="1.0" encoding="utf-8"?>
+<p:notes xmlns:a="http://schemas.openxmlformats.org/drawingml/2006/main" xmlns:p="http://schemas.openxmlformats.org/presentationml/2006/main" xmlns:r="http://schemas.openxmlformats.org/officeDocument/2006/relationships">
+  <p:cSld>
+    <p:spTree>
+      <p:nvGrpSpPr>
+        <p:cNvPr id="1" name=""/>
+        <p:cNvGrpSpPr/>
+        <p:nvPr/>
+      </p:nvGrpSpPr>
+      <p:grpSpPr>
+        <a:xfrm>
+          <a:off x="0" y="0"/>
+          <a:ext cx="0" cy="0"/>
+          <a:chOff x="0" y="0"/>
+          <a:chExt cx="0" cy="0"/>
+        </a:xfrm>
+      </p:grpSpPr>
+      <p:sp>
+        <p:nvSpPr>
+          <p:cNvPr id="2" name="Slide Image Placeholder 1"/>
+          <p:cNvSpPr>
+            <a:spLocks noGrp="1"/>
+          </p:cNvSpPr>
+          <p:nvPr>
+            <p:ph type="sldImg" idx="2"/>
+          </p:nvPr>
+        </p:nvSpPr>
+        <p:spPr/>
+      </p:sp>
+      <p:sp>
+        <p:nvSpPr>
+          <p:cNvPr id="3" name="Notes Placeholder 2"/>
+          <p:cNvSpPr>
+            <a:spLocks noGrp="1"/>
+          </p:cNvSpPr>
+          <p:nvPr>
+            <p:ph type="body" idx="3" sz="quarter"/>
+          </p:nvPr>
+        </p:nvSpPr>
+        <p:spPr/>
+        <p:txBody>
+          <a:bodyPr/>
+          <a:lstStyle/>
+          <a:p>
+            <a:r>
+              <a:t>⏱ 1:15 · by 4:30</a:t>
+            </a:r>
+          </a:p>
+          <a:p/>
+          <a:p>
+            <a:r>
+              <a:t>Models: gemini-2.5-pro = writer · gemini-2.5-flash = parse + verify + repair (cheap). 3.x not enabled in this project yet → model is a swappable env var (MODEL_WRITER / MODEL_PARSER). Schema-valid JSON = Gemini controlled generation + Pydantic response_schema (decode-time). Grounding = long-context (no vector DB for 2 companies); RAG swap = Vertex AI RAG Engine.</a:t>
+            </a:r>
+          </a:p>
+        </p:txBody>
+      </p:sp>
+      <p:sp>
+        <p:nvSpPr>
+          <p:cNvPr id="4" name="Slide Number Placeholder 3"/>
+          <p:cNvSpPr>
+            <a:spLocks noGrp="1"/>
+          </p:cNvSpPr>
+          <p:nvPr>
+            <p:ph type="sldNum" idx="5" sz="quarter"/>
+          </p:nvPr>
+        </p:nvSpPr>
+        <p:spPr/>
+      </p:sp>
+    </p:spTree>
+  </p:cSld>
+  <p:clrMapOvr>
+    <a:masterClrMapping/>
+  </p:clrMapOvr>
+</p:notes>
+</file>
+
+<file path=ppt/notesSlides/notesSlide5.xml><?xml version="1.0" encoding="utf-8"?>
+<p:notes xmlns:a="http://schemas.openxmlformats.org/drawingml/2006/main" xmlns:p="http://schemas.openxmlformats.org/presentationml/2006/main" xmlns:r="http://schemas.openxmlformats.org/officeDocument/2006/relationships">
+  <p:cSld>
+    <p:spTree>
+      <p:nvGrpSpPr>
+        <p:cNvPr id="1" name=""/>
+        <p:cNvGrpSpPr/>
+        <p:nvPr/>
+      </p:nvGrpSpPr>
+      <p:grpSpPr>
+        <a:xfrm>
+          <a:off x="0" y="0"/>
+          <a:ext cx="0" cy="0"/>
+          <a:chOff x="0" y="0"/>
+          <a:chExt cx="0" cy="0"/>
+        </a:xfrm>
+      </p:grpSpPr>
+      <p:sp>
+        <p:nvSpPr>
+          <p:cNvPr id="2" name="Slide Image Placeholder 1"/>
+          <p:cNvSpPr>
+            <a:spLocks noGrp="1"/>
+          </p:cNvSpPr>
+          <p:nvPr>
+            <p:ph type="sldImg" idx="2"/>
+          </p:nvPr>
+        </p:nvSpPr>
+        <p:spPr/>
+      </p:sp>
+      <p:sp>
+        <p:nvSpPr>
+          <p:cNvPr id="3" name="Notes Placeholder 2"/>
+          <p:cNvSpPr>
+            <a:spLocks noGrp="1"/>
+          </p:cNvSpPr>
+          <p:nvPr>
+            <p:ph type="body" idx="3" sz="quarter"/>
+          </p:nvPr>
+        </p:nvSpPr>
+        <p:spPr/>
+        <p:txBody>
+          <a:bodyPr/>
+          <a:lstStyle/>
+          <a:p>
+            <a:r>
+              <a:t>⏱ 2:30 · by 7:00</a:t>
+            </a:r>
+          </a:p>
+          <a:p/>
+          <a:p>
+            <a:r>
+              <a:t>GCP stack — Cloud Run (serverless, scale-to-zero, europe-west1) · Vertex AI / Gemini (NO API key: service-account ADC; GOOGLE_GENAI_USE_VERTEXAI=true, GOOGLE_CLOUD_LOCATION=global) · GCS (PDFs + assets, CMEK key collateral-bucket-key) · Firestore (Native mode, europe-west1: briefs/jobs/outputs) · Pub/Sub + DLQ (async parse worker) · Artifact Registry + Cloud Build (CD: push→build→deploy). Least-privilege Cloud Run SA = ONLY roles/datastore.user + roles/aiplatform.user + bucket storage.objectAdmin + roles/pubsub.publisher. At-scale managed PDF-parse swap = Document AI.</a:t>
+            </a:r>
+          </a:p>
+          <a:p/>
+          <a:p>
+            <a:r>
+              <a:t>AWS equivalents: Cloud Run→App Runner / ECS-Fargate / Lambda · GCS→S3 · Firestore→DynamoDB · Pub/Sub+DLQ→SNS+SQS (or EventBridge) · Vertex/Gemini→Bedrock (Claude) · Document AI→Textract · CMEK→KMS · Cloud Build→CodePipeline/CodeBuild · Artifact Registry→ECR · Memorystore→ElastiCache · BigQuery→Athena/Redshift · Looker→QuickSight · Secret Manager→Secrets Manager · Identity Platform→Cognito · Model Armor→Bedrock Guardrails · IAM→IAM.</a:t>
+            </a:r>
+          </a:p>
+          <a:p/>
+          <a:p>
+            <a:r>
+              <a:t>100% prod-ready for a big org — gaps to own: (1) Multi-tenancy ENFORCED — tenant from the verified token claim + per-tenant CMEK + quotas/budgets (today single-tenant, header-trusted). (2) Network — VPC-SC perimeter, internal-only ingress (IAP / private LB), no public URL. (3) PII — Cloud DLP inspect/redact on ingestion + GDPR right-to-erasure purge. (4) Safety — Model Armor on the model calls. (5) Scale — drop --max-instances 1, run on Firestore+GCS (already supported), tune autoscaling, manage Vertex quota / provisioned throughput. (6) Observability/SLOs — Cloud Trace + Cloud Monitoring alerts + Error Reporting; wire Looker (BigQuery export already built). (7) Cost — per-tenant rate limits + Cloud Billing budget alerts + token caps. (8) CI/CD — tests GATE the pipeline + staging env + canary/blue-green + image scanning + Binary Authorization. (9) DR/backups — Firestore export, GCS object versioning, multi-region failover. (10) Auth — real IdP/SSO (Identity Platform / Okta) + per-tenant RBAC + Cloud Audit Logs. (11) Compliance — SOC2 / ISO / GDPR + a DPA (Vertex enterprise terms: prompts don't train Google's models).</a:t>
+            </a:r>
+          </a:p>
+          <a:p>
+            <a:r>
+              <a:t>Already in place: CMEK · EU storage · least-priv IAM · Pub/Sub DLQ · Terraform IaC · 51 CI tests · eval harness · 365-day retention.</a:t>
+            </a:r>
+          </a:p>
+        </p:txBody>
+      </p:sp>
+      <p:sp>
+        <p:nvSpPr>
+          <p:cNvPr id="4" name="Slide Number Placeholder 3"/>
+          <p:cNvSpPr>
+            <a:spLocks noGrp="1"/>
+          </p:cNvSpPr>
+          <p:nvPr>
+            <p:ph type="sldNum" idx="5" sz="quarter"/>
+          </p:nvPr>
+        </p:nvSpPr>
+        <p:spPr/>
+      </p:sp>
+    </p:spTree>
+  </p:cSld>
+  <p:clrMapOvr>
+    <a:masterClrMapping/>
+  </p:clrMapOvr>
+</p:notes>
+</file>
+
+<file path=ppt/notesSlides/notesSlide6.xml><?xml version="1.0" encoding="utf-8"?>
+<p:notes xmlns:a="http://schemas.openxmlformats.org/drawingml/2006/main" xmlns:p="http://schemas.openxmlformats.org/presentationml/2006/main" xmlns:r="http://schemas.openxmlformats.org/officeDocument/2006/relationships">
+  <p:cSld>
+    <p:spTree>
+      <p:nvGrpSpPr>
+        <p:cNvPr id="1" name=""/>
+        <p:cNvGrpSpPr/>
+        <p:nvPr/>
+      </p:nvGrpSpPr>
+      <p:grpSpPr>
+        <a:xfrm>
+          <a:off x="0" y="0"/>
+          <a:ext cx="0" cy="0"/>
+          <a:chOff x="0" y="0"/>
+          <a:chExt cx="0" cy="0"/>
+        </a:xfrm>
+      </p:grpSpPr>
+      <p:sp>
+        <p:nvSpPr>
+          <p:cNvPr id="2" name="Slide Image Placeholder 1"/>
+          <p:cNvSpPr>
+            <a:spLocks noGrp="1"/>
+          </p:cNvSpPr>
+          <p:nvPr>
+            <p:ph type="sldImg" idx="2"/>
+          </p:nvPr>
+        </p:nvSpPr>
+        <p:spPr/>
+      </p:sp>
+      <p:sp>
+        <p:nvSpPr>
+          <p:cNvPr id="3" name="Notes Placeholder 2"/>
+          <p:cNvSpPr>
+            <a:spLocks noGrp="1"/>
+          </p:cNvSpPr>
+          <p:nvPr>
+            <p:ph type="body" idx="3" sz="quarter"/>
+          </p:nvPr>
+        </p:nvSpPr>
+        <p:spPr/>
+        <p:txBody>
+          <a:bodyPr/>
+          <a:lstStyle/>
+          <a:p>
+            <a:r>
+              <a:t>⏱ 1:15 · by 8:15</a:t>
+            </a:r>
+          </a:p>
+          <a:p/>
+          <a:p>
+            <a:r>
+              <a:t>Faithfulness = claim-level check: every factual block cites a brief fact-id (e.g. recv.fact.3); a dangling/unsupported cite lowers the score. Writer uses ONLY brief facts and ABSTAINS rather than invent. Citations = internal fact-ids, not footnotes. Grounding reduces but does NOT eliminate hallucination → citations + human review before publish (HITL).</a:t>
+            </a:r>
+          </a:p>
+        </p:txBody>
+      </p:sp>
+      <p:sp>
+        <p:nvSpPr>
+          <p:cNvPr id="4" name="Slide Number Placeholder 3"/>
+          <p:cNvSpPr>
+            <a:spLocks noGrp="1"/>
+          </p:cNvSpPr>
+          <p:nvPr>
+            <p:ph type="sldNum" idx="5" sz="quarter"/>
+          </p:nvPr>
+        </p:nvSpPr>
+        <p:spPr/>
+      </p:sp>
+    </p:spTree>
+  </p:cSld>
+  <p:clrMapOvr>
+    <a:masterClrMapping/>
+  </p:clrMapOvr>
+</p:notes>
+</file>
+
+<file path=ppt/notesSlides/notesSlide7.xml><?xml version="1.0" encoding="utf-8"?>
+<p:notes xmlns:a="http://schemas.openxmlformats.org/drawingml/2006/main" xmlns:p="http://schemas.openxmlformats.org/presentationml/2006/main" xmlns:r="http://schemas.openxmlformats.org/officeDocument/2006/relationships">
+  <p:cSld>
+    <p:spTree>
+      <p:nvGrpSpPr>
+        <p:cNvPr id="1" name=""/>
+        <p:cNvGrpSpPr/>
+        <p:nvPr/>
+      </p:nvGrpSpPr>
+      <p:grpSpPr>
+        <a:xfrm>
+          <a:off x="0" y="0"/>
+          <a:ext cx="0" cy="0"/>
+          <a:chOff x="0" y="0"/>
+          <a:chExt cx="0" cy="0"/>
+        </a:xfrm>
+      </p:grpSpPr>
+      <p:sp>
+        <p:nvSpPr>
+          <p:cNvPr id="2" name="Slide Image Placeholder 1"/>
+          <p:cNvSpPr>
+            <a:spLocks noGrp="1"/>
+          </p:cNvSpPr>
+          <p:nvPr>
+            <p:ph type="sldImg" idx="2"/>
+          </p:nvPr>
+        </p:nvSpPr>
+        <p:spPr/>
+      </p:sp>
+      <p:sp>
+        <p:nvSpPr>
+          <p:cNvPr id="3" name="Notes Placeholder 2"/>
+          <p:cNvSpPr>
+            <a:spLocks noGrp="1"/>
+          </p:cNvSpPr>
+          <p:nvPr>
+            <p:ph type="body" idx="3" sz="quarter"/>
+          </p:nvPr>
+        </p:nvSpPr>
+        <p:spPr/>
+        <p:txBody>
+          <a:bodyPr/>
+          <a:lstStyle/>
+          <a:p>
+            <a:r>
+              <a:t>⏱ 1:15 · by 9:30</a:t>
+            </a:r>
+          </a:p>
+          <a:p/>
+          <a:p>
+            <a:r>
+              <a:t>Word limits enforced IN CODE, not by the model (LLMs cannot count tokens). Repair loop is CAPPED (K tries) → graceful fallback = sentence-boundary truncation, flagged in constraints.truncated_blocks (never a hard error). Template = typed Pydantic contract (blocks: id, type, min/max words, image slot + role, theme color in palette). Schema validity guaranteed by controlled generation.</a:t>
+            </a:r>
+          </a:p>
+        </p:txBody>
+      </p:sp>
+      <p:sp>
+        <p:nvSpPr>
+          <p:cNvPr id="4" name="Slide Number Placeholder 3"/>
+          <p:cNvSpPr>
+            <a:spLocks noGrp="1"/>
+          </p:cNvSpPr>
+          <p:nvPr>
+            <p:ph type="sldNum" idx="5" sz="quarter"/>
+          </p:nvPr>
+        </p:nvSpPr>
+        <p:spPr/>
+      </p:sp>
+    </p:spTree>
+  </p:cSld>
+  <p:clrMapOvr>
+    <a:masterClrMapping/>
+  </p:clrMapOvr>
+</p:notes>
+</file>
+
+<file path=ppt/notesSlides/notesSlide8.xml><?xml version="1.0" encoding="utf-8"?>
+<p:notes xmlns:a="http://schemas.openxmlformats.org/drawingml/2006/main" xmlns:p="http://schemas.openxmlformats.org/presentationml/2006/main" xmlns:r="http://schemas.openxmlformats.org/officeDocument/2006/relationships">
+  <p:cSld>
+    <p:spTree>
+      <p:nvGrpSpPr>
+        <p:cNvPr id="1" name=""/>
+        <p:cNvGrpSpPr/>
+        <p:nvPr/>
+      </p:nvGrpSpPr>
+      <p:grpSpPr>
+        <a:xfrm>
+          <a:off x="0" y="0"/>
+          <a:ext cx="0" cy="0"/>
+          <a:chOff x="0" y="0"/>
+          <a:chExt cx="0" cy="0"/>
+        </a:xfrm>
+      </p:grpSpPr>
+      <p:sp>
+        <p:nvSpPr>
+          <p:cNvPr id="2" name="Slide Image Placeholder 1"/>
+          <p:cNvSpPr>
+            <a:spLocks noGrp="1"/>
+          </p:cNvSpPr>
+          <p:nvPr>
+            <p:ph type="sldImg" idx="2"/>
+          </p:nvPr>
+        </p:nvSpPr>
+        <p:spPr/>
+      </p:sp>
+      <p:sp>
+        <p:nvSpPr>
+          <p:cNvPr id="3" name="Notes Placeholder 2"/>
+          <p:cNvSpPr>
+            <a:spLocks noGrp="1"/>
+          </p:cNvSpPr>
+          <p:nvPr>
+            <p:ph type="body" idx="3" sz="quarter"/>
+          </p:nvPr>
+        </p:nvSpPr>
+        <p:spPr/>
+        <p:txBody>
+          <a:bodyPr/>
+          <a:lstStyle/>
+          <a:p>
+            <a:r>
+              <a:t>⏱ 1:30 · by 11:00</a:t>
+            </a:r>
+          </a:p>
+          <a:p/>
+          <a:p>
+            <a:r>
+              <a:t>Auth = TWO layers (defense in depth): authN = Google ID-token (HTTPBearer, verified per request, AUTH_MODE=google); authZ = Cloud Run IAM run.invoker. Injection = parse-time HARD gate, fail closed: Gemini self-flag (primary, reads whole PDF) + regex backup → reject + persist nothing. PDF = DATA channel, not instructions. Managed prod version = Model Armor. Storage = EU (europe-west1) + CMEK; model calls use the GLOBAL Vertex endpoint → EU model-residency is the open gap. Cloud Run scales 0→N on concurrency; parse runs off the request path (Pub/Sub + DLQ).</a:t>
+            </a:r>
+          </a:p>
+        </p:txBody>
+      </p:sp>
+      <p:sp>
+        <p:nvSpPr>
+          <p:cNvPr id="4" name="Slide Number Placeholder 3"/>
+          <p:cNvSpPr>
+            <a:spLocks noGrp="1"/>
+          </p:cNvSpPr>
+          <p:nvPr>
+            <p:ph type="sldNum" idx="5" sz="quarter"/>
+          </p:nvPr>
+        </p:nvSpPr>
+        <p:spPr/>
+      </p:sp>
+    </p:spTree>
+  </p:cSld>
+  <p:clrMapOvr>
+    <a:masterClrMapping/>
+  </p:clrMapOvr>
+</p:notes>
+</file>
+
+<file path=ppt/notesSlides/notesSlide9.xml><?xml version="1.0" encoding="utf-8"?>
+<p:notes xmlns:a="http://schemas.openxmlformats.org/drawingml/2006/main" xmlns:p="http://schemas.openxmlformats.org/presentationml/2006/main" xmlns:r="http://schemas.openxmlformats.org/officeDocument/2006/relationships">
+  <p:cSld>
+    <p:spTree>
+      <p:nvGrpSpPr>
+        <p:cNvPr id="1" name=""/>
+        <p:cNvGrpSpPr/>
+        <p:nvPr/>
+      </p:nvGrpSpPr>
+      <p:grpSpPr>
+        <a:xfrm>
+          <a:off x="0" y="0"/>
+          <a:ext cx="0" cy="0"/>
+          <a:chOff x="0" y="0"/>
+          <a:chExt cx="0" cy="0"/>
+        </a:xfrm>
+      </p:grpSpPr>
+      <p:sp>
+        <p:nvSpPr>
+          <p:cNvPr id="2" name="Slide Image Placeholder 1"/>
+          <p:cNvSpPr>
+            <a:spLocks noGrp="1"/>
+          </p:cNvSpPr>
+          <p:nvPr>
+            <p:ph type="sldImg" idx="2"/>
+          </p:nvPr>
+        </p:nvSpPr>
+        <p:spPr/>
+      </p:sp>
+      <p:sp>
+        <p:nvSpPr>
+          <p:cNvPr id="3" name="Notes Placeholder 2"/>
+          <p:cNvSpPr>
+            <a:spLocks noGrp="1"/>
+          </p:cNvSpPr>
+          <p:nvPr>
+            <p:ph type="body" idx="3" sz="quarter"/>
+          </p:nvPr>
+        </p:nvSpPr>
+        <p:spPr/>
+        <p:txBody>
+          <a:bodyPr/>
+          <a:lstStyle/>
+          <a:p>
+            <a:r>
+              <a:t>⏱ 1:45 · by 12:45</a:t>
+            </a:r>
+          </a:p>
+          <a:p/>
+          <a:p>
+            <a:r>
+              <a:t>Cost ≈ $0.012 per article (measured: token count + USD stamped on every output). 51 offline tests (no network, no real model). Demo flow: curl upload sender + receiver PDFs → GET /companies/{pair} (poll until both briefs ready) → POST /generate → 200 ArticleJSON. Writer = 2.5 Pro, parse/verify = 2.5 Flash.</a:t>
+            </a:r>
+          </a:p>
+        </p:txBody>
+      </p:sp>
+      <p:sp>
+        <p:nvSpPr>
+          <p:cNvPr id="4" name="Slide Number Placeholder 3"/>
+          <p:cNvSpPr>
+            <a:spLocks noGrp="1"/>
+          </p:cNvSpPr>
+          <p:nvPr>
+            <p:ph type="sldNum" idx="5" sz="quarter"/>
+          </p:nvPr>
+        </p:nvSpPr>
+        <p:spPr/>
+      </p:sp>
+    </p:spTree>
+  </p:cSld>
+  <p:clrMapOvr>
+    <a:masterClrMapping/>
+  </p:clrMapOvr>
+</p:notes>
 </file>
 
 <file path=ppt/slideLayouts/slideLayout1.xml><?xml version="1.0" encoding="utf-8"?>
@@ -11622,4 +12825,324 @@
   </a:objectDefaults>
   <a:extraClrSchemeLst/>
 </a:theme>
+</file>
+
+<file path=ppt/theme/theme2.xml><?xml version="1.0" encoding="utf-8"?>
+<a:theme xmlns:a="http://schemas.openxmlformats.org/drawingml/2006/main" name="Office Theme">
+  <a:themeElements>
+    <a:clrScheme name="Office">
+      <a:dk1>
+        <a:sysClr val="windowText" lastClr="000000"/>
+      </a:dk1>
+      <a:lt1>
+        <a:sysClr val="window" lastClr="FFFFFF"/>
+      </a:lt1>
+      <a:dk2>
+        <a:srgbClr val="1F497D"/>
+      </a:dk2>
+      <a:lt2>
+        <a:srgbClr val="EEECE1"/>
+      </a:lt2>
+      <a:accent1>
+        <a:srgbClr val="4F81BD"/>
+      </a:accent1>
+      <a:accent2>
+        <a:srgbClr val="C0504D"/>
+      </a:accent2>
+      <a:accent3>
+        <a:srgbClr val="9BBB59"/>
+      </a:accent3>
+      <a:accent4>
+        <a:srgbClr val="8064A2"/>
+      </a:accent4>
+      <a:accent5>
+        <a:srgbClr val="4BACC6"/>
+      </a:accent5>
+      <a:accent6>
+        <a:srgbClr val="F79646"/>
+      </a:accent6>
+      <a:hlink>
+        <a:srgbClr val="0000FF"/>
+      </a:hlink>
+      <a:folHlink>
+        <a:srgbClr val="800080"/>
+      </a:folHlink>
+    </a:clrScheme>
+    <a:fontScheme name="Office">
+      <a:majorFont>
+        <a:latin typeface="Calibri"/>
+        <a:ea typeface=""/>
+        <a:cs typeface=""/>
+        <a:font script="Jpan" typeface="ＭＳ Ｐゴシック"/>
+        <a:font script="Hang" typeface="맑은 고딕"/>
+        <a:font script="Hans" typeface="宋体"/>
+        <a:font script="Hant" typeface="新細明體"/>
+        <a:font script="Arab" typeface="Times New Roman"/>
+        <a:font script="Hebr" typeface="Times New Roman"/>
+        <a:font script="Thai" typeface="Angsana New"/>
+        <a:font script="Ethi" typeface="Nyala"/>
+        <a:font script="Beng" typeface="Vrinda"/>
+        <a:font script="Gujr" typeface="Shruti"/>
+        <a:font script="Khmr" typeface="MoolBoran"/>
+        <a:font script="Knda" typeface="Tunga"/>
+        <a:font script="Guru" typeface="Raavi"/>
+        <a:font script="Cans" typeface="Euphemia"/>
+        <a:font script="Cher" typeface="Plantagenet Cherokee"/>
+        <a:font script="Yiii" typeface="Microsoft Yi Baiti"/>
+        <a:font script="Tibt" typeface="Microsoft Himalaya"/>
+        <a:font script="Thaa" typeface="MV Boli"/>
+        <a:font script="Deva" typeface="Mangal"/>
+        <a:font script="Telu" typeface="Gautami"/>
+        <a:font script="Taml" typeface="Latha"/>
+        <a:font script="Syrc" typeface="Estrangelo Edessa"/>
+        <a:font script="Orya" typeface="Kalinga"/>
+        <a:font script="Mlym" typeface="Kartika"/>
+        <a:font script="Laoo" typeface="DokChampa"/>
+        <a:font script="Sinh" typeface="Iskoola Pota"/>
+        <a:font script="Mong" typeface="Mongolian Baiti"/>
+        <a:font script="Viet" typeface="Times New Roman"/>
+        <a:font script="Uigh" typeface="Microsoft Uighur"/>
+        <a:font script="Geor" typeface="Sylfaen"/>
+      </a:majorFont>
+      <a:minorFont>
+        <a:latin typeface="Calibri"/>
+        <a:ea typeface=""/>
+        <a:cs typeface=""/>
+        <a:font script="Jpan" typeface="ＭＳ Ｐゴシック"/>
+        <a:font script="Hang" typeface="맑은 고딕"/>
+        <a:font script="Hans" typeface="宋体"/>
+        <a:font script="Hant" typeface="新細明體"/>
+        <a:font script="Arab" typeface="Arial"/>
+        <a:font script="Hebr" typeface="Arial"/>
+        <a:font script="Thai" typeface="Cordia New"/>
+        <a:font script="Ethi" typeface="Nyala"/>
+        <a:font script="Beng" typeface="Vrinda"/>
+        <a:font script="Gujr" typeface="Shruti"/>
+        <a:font script="Khmr" typeface="DaunPenh"/>
+        <a:font script="Knda" typeface="Tunga"/>
+        <a:font script="Guru" typeface="Raavi"/>
+        <a:font script="Cans" typeface="Euphemia"/>
+        <a:font script="Cher" typeface="Plantagenet Cherokee"/>
+        <a:font script="Yiii" typeface="Microsoft Yi Baiti"/>
+        <a:font script="Tibt" typeface="Microsoft Himalaya"/>
+        <a:font script="Thaa" typeface="MV Boli"/>
+        <a:font script="Deva" typeface="Mangal"/>
+        <a:font script="Telu" typeface="Gautami"/>
+        <a:font script="Taml" typeface="Latha"/>
+        <a:font script="Syrc" typeface="Estrangelo Edessa"/>
+        <a:font script="Orya" typeface="Kalinga"/>
+        <a:font script="Mlym" typeface="Kartika"/>
+        <a:font script="Laoo" typeface="DokChampa"/>
+        <a:font script="Sinh" typeface="Iskoola Pota"/>
+        <a:font script="Mong" typeface="Mongolian Baiti"/>
+        <a:font script="Viet" typeface="Arial"/>
+        <a:font script="Uigh" typeface="Microsoft Uighur"/>
+        <a:font script="Geor" typeface="Sylfaen"/>
+      </a:minorFont>
+    </a:fontScheme>
+    <a:fmtScheme name="Office">
+      <a:fillStyleLst>
+        <a:solidFill>
+          <a:schemeClr val="phClr"/>
+        </a:solidFill>
+        <a:gradFill rotWithShape="1">
+          <a:gsLst>
+            <a:gs pos="0">
+              <a:schemeClr val="phClr">
+                <a:tint val="50000"/>
+                <a:satMod val="300000"/>
+              </a:schemeClr>
+            </a:gs>
+            <a:gs pos="35000">
+              <a:schemeClr val="phClr">
+                <a:tint val="37000"/>
+                <a:satMod val="300000"/>
+              </a:schemeClr>
+            </a:gs>
+            <a:gs pos="100000">
+              <a:schemeClr val="phClr">
+                <a:tint val="15000"/>
+                <a:satMod val="350000"/>
+              </a:schemeClr>
+            </a:gs>
+          </a:gsLst>
+          <a:lin ang="16200000" scaled="1"/>
+        </a:gradFill>
+        <a:gradFill rotWithShape="1">
+          <a:gsLst>
+            <a:gs pos="0">
+              <a:schemeClr val="phClr">
+                <a:tint val="100000"/>
+                <a:shade val="100000"/>
+                <a:satMod val="130000"/>
+              </a:schemeClr>
+            </a:gs>
+            <a:gs pos="100000">
+              <a:schemeClr val="phClr">
+                <a:tint val="50000"/>
+                <a:shade val="100000"/>
+                <a:satMod val="350000"/>
+              </a:schemeClr>
+            </a:gs>
+          </a:gsLst>
+          <a:lin ang="16200000" scaled="0"/>
+        </a:gradFill>
+      </a:fillStyleLst>
+      <a:lnStyleLst>
+        <a:ln w="9525" cap="flat" cmpd="sng" algn="ctr">
+          <a:solidFill>
+            <a:schemeClr val="phClr">
+              <a:shade val="95000"/>
+              <a:satMod val="105000"/>
+            </a:schemeClr>
+          </a:solidFill>
+          <a:prstDash val="solid"/>
+        </a:ln>
+        <a:ln w="25400" cap="flat" cmpd="sng" algn="ctr">
+          <a:solidFill>
+            <a:schemeClr val="phClr"/>
+          </a:solidFill>
+          <a:prstDash val="solid"/>
+        </a:ln>
+        <a:ln w="38100" cap="flat" cmpd="sng" algn="ctr">
+          <a:solidFill>
+            <a:schemeClr val="phClr"/>
+          </a:solidFill>
+          <a:prstDash val="solid"/>
+        </a:ln>
+      </a:lnStyleLst>
+      <a:effectStyleLst>
+        <a:effectStyle>
+          <a:effectLst>
+            <a:outerShdw blurRad="40000" dist="20000" dir="5400000" rotWithShape="0">
+              <a:srgbClr val="000000">
+                <a:alpha val="38000"/>
+              </a:srgbClr>
+            </a:outerShdw>
+          </a:effectLst>
+        </a:effectStyle>
+        <a:effectStyle>
+          <a:effectLst>
+            <a:outerShdw blurRad="40000" dist="23000" dir="5400000" rotWithShape="0">
+              <a:srgbClr val="000000">
+                <a:alpha val="35000"/>
+              </a:srgbClr>
+            </a:outerShdw>
+          </a:effectLst>
+        </a:effectStyle>
+        <a:effectStyle>
+          <a:effectLst>
+            <a:outerShdw blurRad="40000" dist="23000" dir="5400000" rotWithShape="0">
+              <a:srgbClr val="000000">
+                <a:alpha val="35000"/>
+              </a:srgbClr>
+            </a:outerShdw>
+          </a:effectLst>
+          <a:scene3d>
+            <a:camera prst="orthographicFront">
+              <a:rot lat="0" lon="0" rev="0"/>
+            </a:camera>
+            <a:lightRig rig="threePt" dir="t">
+              <a:rot lat="0" lon="0" rev="1200000"/>
+            </a:lightRig>
+          </a:scene3d>
+          <a:sp3d>
+            <a:bevelT w="63500" h="25400"/>
+          </a:sp3d>
+        </a:effectStyle>
+      </a:effectStyleLst>
+      <a:bgFillStyleLst>
+        <a:solidFill>
+          <a:schemeClr val="phClr"/>
+        </a:solidFill>
+        <a:gradFill rotWithShape="1">
+          <a:gsLst>
+            <a:gs pos="0">
+              <a:schemeClr val="phClr">
+                <a:tint val="40000"/>
+                <a:satMod val="350000"/>
+              </a:schemeClr>
+            </a:gs>
+            <a:gs pos="40000">
+              <a:schemeClr val="phClr">
+                <a:tint val="45000"/>
+                <a:shade val="99000"/>
+                <a:satMod val="350000"/>
+              </a:schemeClr>
+            </a:gs>
+            <a:gs pos="100000">
+              <a:schemeClr val="phClr">
+                <a:shade val="20000"/>
+                <a:satMod val="255000"/>
+              </a:schemeClr>
+            </a:gs>
+          </a:gsLst>
+          <a:path path="circle">
+            <a:fillToRect l="50000" t="-80000" r="50000" b="180000"/>
+          </a:path>
+        </a:gradFill>
+        <a:gradFill rotWithShape="1">
+          <a:gsLst>
+            <a:gs pos="0">
+              <a:schemeClr val="phClr">
+                <a:tint val="80000"/>
+                <a:satMod val="300000"/>
+              </a:schemeClr>
+            </a:gs>
+            <a:gs pos="100000">
+              <a:schemeClr val="phClr">
+                <a:shade val="30000"/>
+                <a:satMod val="200000"/>
+              </a:schemeClr>
+            </a:gs>
+          </a:gsLst>
+          <a:path path="circle">
+            <a:fillToRect l="50000" t="50000" r="50000" b="50000"/>
+          </a:path>
+        </a:gradFill>
+      </a:bgFillStyleLst>
+    </a:fmtScheme>
+  </a:themeElements>
+  <a:objectDefaults>
+    <a:spDef>
+      <a:spPr/>
+      <a:bodyPr/>
+      <a:lstStyle/>
+      <a:style>
+        <a:lnRef idx="1">
+          <a:schemeClr val="accent1"/>
+        </a:lnRef>
+        <a:fillRef idx="3">
+          <a:schemeClr val="accent1"/>
+        </a:fillRef>
+        <a:effectRef idx="2">
+          <a:schemeClr val="accent1"/>
+        </a:effectRef>
+        <a:fontRef idx="minor">
+          <a:schemeClr val="lt1"/>
+        </a:fontRef>
+      </a:style>
+    </a:spDef>
+    <a:lnDef>
+      <a:spPr/>
+      <a:bodyPr/>
+      <a:lstStyle/>
+      <a:style>
+        <a:lnRef idx="2">
+          <a:schemeClr val="accent1"/>
+        </a:lnRef>
+        <a:fillRef idx="0">
+          <a:schemeClr val="accent1"/>
+        </a:fillRef>
+        <a:effectRef idx="1">
+          <a:schemeClr val="accent1"/>
+        </a:effectRef>
+        <a:fontRef idx="minor">
+          <a:schemeClr val="tx1"/>
+        </a:fontRef>
+      </a:style>
+    </a:lnDef>
+  </a:objectDefaults>
+  <a:extraClrSchemeLst/>
+</a:theme>
 </file>